--- a/SpaceX_Capstone_Presentation.pptx
+++ b/SpaceX_Capstone_Presentation.pptx
@@ -4,6 +4,9 @@
   <p:sldMasterIdLst>
     <p:sldMasterId id="2147483648" r:id="rId1"/>
   </p:sldMasterIdLst>
+  <p:notesMasterIdLst>
+    <p:notesMasterId r:id="rId16"/>
+  </p:notesMasterIdLst>
   <p:sldIdLst>
     <p:sldId id="256" r:id="rId2"/>
     <p:sldId id="257" r:id="rId3"/>
@@ -20,10 +23,7 @@
     <p:sldId id="268" r:id="rId14"/>
     <p:sldId id="269" r:id="rId15"/>
   </p:sldIdLst>
-  <p:notesMasterIdLst>
-    <p:notesMasterId r:id="rId16"/>
-  </p:notesMasterIdLst>
-  <p:sldSz cx="9144000" cy="5143500"/>
+  <p:sldSz cx="9144000" cy="5143500" type="screen16x9"/>
   <p:notesSz cx="5143500" cy="9144000"/>
   <p:defaultTextStyle>
     <a:lvl1pPr marL="0" algn="l" defTabSz="914400" rtl="0" eaLnBrk="1" latinLnBrk="0" hangingPunct="1">
@@ -117,13 +117,20 @@
       </a:defRPr>
     </a:lvl9pPr>
   </p:defaultTextStyle>
+  <p:extLst>
+    <p:ext uri="{EFAFB233-063F-42B5-8137-9DF3F51BA10A}">
+      <p15:sldGuideLst xmlns:p15="http://schemas.microsoft.com/office/powerpoint/2012/main"/>
+    </p:ext>
+  </p:extLst>
 </p:presentation>
 </file>
 
 <file path=ppt/charts/chart1.xml><?xml version="1.0" encoding="utf-8"?>
-<c:chartSpace xmlns:c="http://schemas.openxmlformats.org/drawingml/2006/chart" xmlns:a="http://schemas.openxmlformats.org/drawingml/2006/main" xmlns:r="http://schemas.openxmlformats.org/officeDocument/2006/relationships">
+<c:chartSpace xmlns:c="http://schemas.openxmlformats.org/drawingml/2006/chart" xmlns:a="http://schemas.openxmlformats.org/drawingml/2006/main" xmlns:r="http://schemas.openxmlformats.org/officeDocument/2006/relationships" xmlns:c16r2="http://schemas.microsoft.com/office/drawing/2015/06/chart">
   <c:date1904 val="0"/>
+  <c:lang val="fr-FR"/>
   <c:roundedCorners val="1"/>
+  <c:style val="2"/>
   <c:chart>
     <c:title>
       <c:tx>
@@ -151,13 +158,13 @@
           </a:p>
         </c:rich>
       </c:tx>
-      <c:layout/>
       <c:overlay val="0"/>
     </c:title>
     <c:autoTitleDeleted val="0"/>
     <c:plotArea>
       <c:layout/>
       <c:lineChart>
+        <c:grouping val="standard"/>
         <c:varyColors val="0"/>
         <c:ser>
           <c:idx val="0"/>
@@ -174,9 +181,6 @@
             </c:strRef>
           </c:tx>
           <c:spPr>
-            <a:solidFill>
-              <a:srgbClr val="0891B2"/>
-            </a:solidFill>
             <a:ln w="31750" cap="flat">
               <a:solidFill>
                 <a:srgbClr val="0891B2"/>
@@ -186,31 +190,6 @@
             </a:ln>
             <a:effectLst/>
           </c:spPr>
-          <c:invertIfNegative val="0"/>
-          <c:dLbls>
-            <c:numFmt formatCode="#,##0" sourceLinked="0"/>
-            <c:txPr>
-              <a:bodyPr/>
-              <a:lstStyle/>
-              <a:p>
-                <a:pPr>
-                  <a:defRPr b="0" i="0" strike="noStrike" sz="1200" u="none">
-                    <a:solidFill>
-                      <a:srgbClr val="000000"/>
-                    </a:solidFill>
-                    <a:latin typeface="Arial"/>
-                  </a:defRPr>
-                </a:pPr>
-              </a:p>
-            </c:txPr>
-            <c:showLegendKey val="0"/>
-            <c:showVal val="0"/>
-            <c:showCatName val="0"/>
-            <c:showSerName val="0"/>
-            <c:showPercent val="0"/>
-            <c:showBubbleSize val="0"/>
-            <c:showLeaderLines val="0"/>
-          </c:dLbls>
           <c:marker>
             <c:symbol val="circle"/>
             <c:size val="6"/>
@@ -229,44 +208,42 @@
             </c:spPr>
           </c:marker>
           <c:cat>
-            <c:multiLvlStrRef>
+            <c:strRef>
               <c:f>Sheet1!$A$2:$A$11</c:f>
-              <c:multiLvlStrCache>
+              <c:strCache>
                 <c:ptCount val="10"/>
-                <c:lvl>
-                  <c:pt idx="0">
-                    <c:v>2010</c:v>
-                  </c:pt>
-                  <c:pt idx="1">
-                    <c:v>2012</c:v>
-                  </c:pt>
-                  <c:pt idx="2">
-                    <c:v>2013</c:v>
-                  </c:pt>
-                  <c:pt idx="3">
-                    <c:v>2014</c:v>
-                  </c:pt>
-                  <c:pt idx="4">
-                    <c:v>2015</c:v>
-                  </c:pt>
-                  <c:pt idx="5">
-                    <c:v>2016</c:v>
-                  </c:pt>
-                  <c:pt idx="6">
-                    <c:v>2017</c:v>
-                  </c:pt>
-                  <c:pt idx="7">
-                    <c:v>2018</c:v>
-                  </c:pt>
-                  <c:pt idx="8">
-                    <c:v>2019</c:v>
-                  </c:pt>
-                  <c:pt idx="9">
-                    <c:v>2020</c:v>
-                  </c:pt>
-                </c:lvl>
-              </c:multiLvlStrCache>
-            </c:multiLvlStrRef>
+                <c:pt idx="0">
+                  <c:v>2010</c:v>
+                </c:pt>
+                <c:pt idx="1">
+                  <c:v>2012</c:v>
+                </c:pt>
+                <c:pt idx="2">
+                  <c:v>2013</c:v>
+                </c:pt>
+                <c:pt idx="3">
+                  <c:v>2014</c:v>
+                </c:pt>
+                <c:pt idx="4">
+                  <c:v>2015</c:v>
+                </c:pt>
+                <c:pt idx="5">
+                  <c:v>2016</c:v>
+                </c:pt>
+                <c:pt idx="6">
+                  <c:v>2017</c:v>
+                </c:pt>
+                <c:pt idx="7">
+                  <c:v>2018</c:v>
+                </c:pt>
+                <c:pt idx="8">
+                  <c:v>2019</c:v>
+                </c:pt>
+                <c:pt idx="9">
+                  <c:v>2020</c:v>
+                </c:pt>
+              </c:strCache>
+            </c:strRef>
           </c:cat>
           <c:val>
             <c:numRef>
@@ -287,7 +264,7 @@
                   <c:v>0.43</c:v>
                 </c:pt>
                 <c:pt idx="4">
-                  <c:v>0.57</c:v>
+                  <c:v>0.56999999999999995</c:v>
                 </c:pt>
                 <c:pt idx="5">
                   <c:v>0.67</c:v>
@@ -308,35 +285,24 @@
             </c:numRef>
           </c:val>
           <c:smooth val="1"/>
+          <c:extLst>
+            <c:ext xmlns:c16="http://schemas.microsoft.com/office/drawing/2014/chart" uri="{C3380CC4-5D6E-409C-BE32-E72D297353CC}">
+              <c16:uniqueId val="{00000000-A182-401F-A2D9-668C1F081513}"/>
+            </c:ext>
+          </c:extLst>
         </c:ser>
         <c:dLbls>
-          <c:numFmt formatCode="#,##0" sourceLinked="0"/>
-          <c:txPr>
-            <a:bodyPr/>
-            <a:lstStyle/>
-            <a:p>
-              <a:pPr>
-                <a:defRPr b="0" i="0" strike="noStrike" sz="1200" u="none">
-                  <a:solidFill>
-                    <a:srgbClr val="000000"/>
-                  </a:solidFill>
-                  <a:latin typeface="Arial"/>
-                </a:defRPr>
-              </a:pPr>
-            </a:p>
-          </c:txPr>
           <c:showLegendKey val="0"/>
           <c:showVal val="0"/>
           <c:showCatName val="0"/>
           <c:showSerName val="0"/>
           <c:showPercent val="0"/>
           <c:showBubbleSize val="0"/>
-          <c:showLeaderLines val="0"/>
         </c:dLbls>
         <c:marker val="1"/>
+        <c:smooth val="0"/>
         <c:axId val="2094734554"/>
         <c:axId val="2094734552"/>
-        <c:axId val="2094734556"/>
       </c:lineChart>
       <c:catAx>
         <c:axId val="2094734554"/>
@@ -377,6 +343,7 @@
         <c:crosses val="autoZero"/>
         <c:auto val="1"/>
         <c:lblAlgn val="ctr"/>
+        <c:lblOffset val="100"/>
         <c:noMultiLvlLbl val="1"/>
       </c:catAx>
       <c:valAx>
@@ -441,6 +408,7 @@
     </c:plotArea>
     <c:plotVisOnly val="1"/>
     <c:dispBlanksAs val="span"/>
+    <c:showDLblsOverMax val="1"/>
   </c:chart>
   <c:spPr>
     <a:solidFill>
@@ -458,9 +426,11 @@
 </file>
 
 <file path=ppt/charts/chart2.xml><?xml version="1.0" encoding="utf-8"?>
-<c:chartSpace xmlns:c="http://schemas.openxmlformats.org/drawingml/2006/chart" xmlns:a="http://schemas.openxmlformats.org/drawingml/2006/main" xmlns:r="http://schemas.openxmlformats.org/officeDocument/2006/relationships">
+<c:chartSpace xmlns:c="http://schemas.openxmlformats.org/drawingml/2006/chart" xmlns:a="http://schemas.openxmlformats.org/drawingml/2006/main" xmlns:r="http://schemas.openxmlformats.org/officeDocument/2006/relationships" xmlns:c16r2="http://schemas.microsoft.com/office/drawing/2015/06/chart">
   <c:date1904 val="0"/>
+  <c:lang val="fr-FR"/>
   <c:roundedCorners val="1"/>
+  <c:style val="2"/>
   <c:chart>
     <c:title>
       <c:tx>
@@ -488,7 +458,6 @@
           </a:p>
         </c:rich>
       </c:tx>
-      <c:layout/>
       <c:overlay val="0"/>
     </c:title>
     <c:autoTitleDeleted val="0"/>
@@ -521,18 +490,26 @@
           <c:invertIfNegative val="0"/>
           <c:dLbls>
             <c:numFmt formatCode="#,##0" sourceLinked="0"/>
+            <c:spPr>
+              <a:noFill/>
+              <a:ln>
+                <a:noFill/>
+              </a:ln>
+              <a:effectLst/>
+            </c:spPr>
             <c:txPr>
               <a:bodyPr/>
               <a:lstStyle/>
               <a:p>
                 <a:pPr>
-                  <a:defRPr b="0" i="0" strike="noStrike" sz="1200" u="none">
+                  <a:defRPr sz="1200" b="0" i="0" u="none" strike="noStrike">
                     <a:solidFill>
                       <a:srgbClr val="0B1D3A"/>
                     </a:solidFill>
                     <a:latin typeface="Arial"/>
                   </a:defRPr>
                 </a:pPr>
+                <a:endParaRPr lang="fr-FR"/>
               </a:p>
             </c:txPr>
             <c:showLegendKey val="0"/>
@@ -542,25 +519,28 @@
             <c:showPercent val="0"/>
             <c:showBubbleSize val="0"/>
             <c:showLeaderLines val="0"/>
+            <c:extLst>
+              <c:ext xmlns:c15="http://schemas.microsoft.com/office/drawing/2012/chart" uri="{CE6537A1-D6FC-4f65-9D91-7224C49458BB}">
+                <c15:showLeaderLines val="0"/>
+              </c:ext>
+            </c:extLst>
           </c:dLbls>
           <c:cat>
-            <c:multiLvlStrRef>
+            <c:strRef>
               <c:f>Sheet1!$A$2:$A$4</c:f>
-              <c:multiLvlStrCache>
+              <c:strCache>
                 <c:ptCount val="3"/>
-                <c:lvl>
-                  <c:pt idx="0">
-                    <c:v>CCAFS SLC 40</c:v>
-                  </c:pt>
-                  <c:pt idx="1">
-                    <c:v>KSC LC 39A</c:v>
-                  </c:pt>
-                  <c:pt idx="2">
-                    <c:v>VAFB SLC 4E</c:v>
-                  </c:pt>
-                </c:lvl>
-              </c:multiLvlStrCache>
-            </c:multiLvlStrRef>
+                <c:pt idx="0">
+                  <c:v>CCAFS SLC 40</c:v>
+                </c:pt>
+                <c:pt idx="1">
+                  <c:v>KSC LC 39A</c:v>
+                </c:pt>
+                <c:pt idx="2">
+                  <c:v>VAFB SLC 4E</c:v>
+                </c:pt>
+              </c:strCache>
+            </c:strRef>
           </c:cat>
           <c:val>
             <c:numRef>
@@ -580,36 +560,23 @@
               </c:numCache>
             </c:numRef>
           </c:val>
+          <c:extLst>
+            <c:ext xmlns:c16="http://schemas.microsoft.com/office/drawing/2014/chart" uri="{C3380CC4-5D6E-409C-BE32-E72D297353CC}">
+              <c16:uniqueId val="{00000000-3A09-46A0-9F67-CC91EBA18501}"/>
+            </c:ext>
+          </c:extLst>
         </c:ser>
         <c:dLbls>
-          <c:numFmt formatCode="#,##0" sourceLinked="0"/>
-          <c:txPr>
-            <a:bodyPr/>
-            <a:lstStyle/>
-            <a:p>
-              <a:pPr>
-                <a:defRPr b="0" i="0" strike="noStrike" sz="1200" u="none">
-                  <a:solidFill>
-                    <a:srgbClr val="0B1D3A"/>
-                  </a:solidFill>
-                  <a:latin typeface="Arial"/>
-                </a:defRPr>
-              </a:pPr>
-            </a:p>
-          </c:txPr>
           <c:showLegendKey val="0"/>
           <c:showVal val="1"/>
           <c:showCatName val="0"/>
           <c:showSerName val="0"/>
           <c:showPercent val="0"/>
           <c:showBubbleSize val="0"/>
-          <c:showLeaderLines val="0"/>
         </c:dLbls>
         <c:gapWidth val="150"/>
-        <c:overlap val="0"/>
         <c:axId val="2094734554"/>
         <c:axId val="2094734552"/>
-        <c:axId val="2094734556"/>
       </c:barChart>
       <c:catAx>
         <c:axId val="2094734554"/>
@@ -650,6 +617,7 @@
         <c:crosses val="autoZero"/>
         <c:auto val="1"/>
         <c:lblAlgn val="ctr"/>
+        <c:lblOffset val="100"/>
         <c:noMultiLvlLbl val="1"/>
       </c:catAx>
       <c:valAx>
@@ -712,6 +680,7 @@
     </c:plotArea>
     <c:plotVisOnly val="1"/>
     <c:dispBlanksAs val="span"/>
+    <c:showDLblsOverMax val="1"/>
   </c:chart>
   <c:spPr>
     <a:solidFill>
@@ -729,9 +698,11 @@
 </file>
 
 <file path=ppt/charts/chart3.xml><?xml version="1.0" encoding="utf-8"?>
-<c:chartSpace xmlns:c="http://schemas.openxmlformats.org/drawingml/2006/chart" xmlns:a="http://schemas.openxmlformats.org/drawingml/2006/main" xmlns:r="http://schemas.openxmlformats.org/officeDocument/2006/relationships">
+<c:chartSpace xmlns:c="http://schemas.openxmlformats.org/drawingml/2006/chart" xmlns:a="http://schemas.openxmlformats.org/drawingml/2006/main" xmlns:r="http://schemas.openxmlformats.org/officeDocument/2006/relationships" xmlns:c16r2="http://schemas.microsoft.com/office/drawing/2015/06/chart">
   <c:date1904 val="0"/>
+  <c:lang val="fr-FR"/>
   <c:roundedCorners val="1"/>
+  <c:style val="2"/>
   <c:chart>
     <c:title>
       <c:tx>
@@ -759,7 +730,6 @@
           </a:p>
         </c:rich>
       </c:tx>
-      <c:layout/>
       <c:overlay val="0"/>
     </c:title>
     <c:autoTitleDeleted val="0"/>
@@ -792,18 +762,26 @@
           <c:invertIfNegative val="0"/>
           <c:dLbls>
             <c:numFmt formatCode="#,##0" sourceLinked="0"/>
+            <c:spPr>
+              <a:noFill/>
+              <a:ln>
+                <a:noFill/>
+              </a:ln>
+              <a:effectLst/>
+            </c:spPr>
             <c:txPr>
               <a:bodyPr/>
               <a:lstStyle/>
               <a:p>
                 <a:pPr>
-                  <a:defRPr b="0" i="0" strike="noStrike" sz="1200" u="none">
+                  <a:defRPr sz="1200" b="0" i="0" u="none" strike="noStrike">
                     <a:solidFill>
                       <a:srgbClr val="0B1D3A"/>
                     </a:solidFill>
                     <a:latin typeface="Arial"/>
                   </a:defRPr>
                 </a:pPr>
+                <a:endParaRPr lang="fr-FR"/>
               </a:p>
             </c:txPr>
             <c:showLegendKey val="0"/>
@@ -813,30 +791,33 @@
             <c:showPercent val="0"/>
             <c:showBubbleSize val="0"/>
             <c:showLeaderLines val="0"/>
+            <c:extLst>
+              <c:ext xmlns:c15="http://schemas.microsoft.com/office/drawing/2012/chart" uri="{CE6537A1-D6FC-4f65-9D91-7224C49458BB}">
+                <c15:showLeaderLines val="0"/>
+              </c:ext>
+            </c:extLst>
           </c:dLbls>
           <c:cat>
-            <c:multiLvlStrRef>
+            <c:strRef>
               <c:f>Sheet1!$A$2:$A$5</c:f>
-              <c:multiLvlStrCache>
+              <c:strCache>
                 <c:ptCount val="4"/>
-                <c:lvl>
-                  <c:pt idx="0">
-                    <c:v>Logistic
+                <c:pt idx="0">
+                  <c:v>Logistic
 Regression</c:v>
-                  </c:pt>
-                  <c:pt idx="1">
-                    <c:v>SVM</c:v>
-                  </c:pt>
-                  <c:pt idx="2">
-                    <c:v>Decision
+                </c:pt>
+                <c:pt idx="1">
+                  <c:v>SVM</c:v>
+                </c:pt>
+                <c:pt idx="2">
+                  <c:v>Decision
 Tree</c:v>
-                  </c:pt>
-                  <c:pt idx="3">
-                    <c:v>KNN</c:v>
-                  </c:pt>
-                </c:lvl>
-              </c:multiLvlStrCache>
-            </c:multiLvlStrRef>
+                </c:pt>
+                <c:pt idx="3">
+                  <c:v>KNN</c:v>
+                </c:pt>
+              </c:strCache>
+            </c:strRef>
           </c:cat>
           <c:val>
             <c:numRef>
@@ -859,36 +840,23 @@
               </c:numCache>
             </c:numRef>
           </c:val>
+          <c:extLst>
+            <c:ext xmlns:c16="http://schemas.microsoft.com/office/drawing/2014/chart" uri="{C3380CC4-5D6E-409C-BE32-E72D297353CC}">
+              <c16:uniqueId val="{00000000-A402-4BE1-95DA-5A960A6B06CE}"/>
+            </c:ext>
+          </c:extLst>
         </c:ser>
         <c:dLbls>
-          <c:numFmt formatCode="#,##0" sourceLinked="0"/>
-          <c:txPr>
-            <a:bodyPr/>
-            <a:lstStyle/>
-            <a:p>
-              <a:pPr>
-                <a:defRPr b="0" i="0" strike="noStrike" sz="1200" u="none">
-                  <a:solidFill>
-                    <a:srgbClr val="0B1D3A"/>
-                  </a:solidFill>
-                  <a:latin typeface="Arial"/>
-                </a:defRPr>
-              </a:pPr>
-            </a:p>
-          </c:txPr>
           <c:showLegendKey val="0"/>
           <c:showVal val="1"/>
           <c:showCatName val="0"/>
           <c:showSerName val="0"/>
           <c:showPercent val="0"/>
           <c:showBubbleSize val="0"/>
-          <c:showLeaderLines val="0"/>
         </c:dLbls>
         <c:gapWidth val="150"/>
-        <c:overlap val="0"/>
         <c:axId val="2094734554"/>
         <c:axId val="2094734552"/>
-        <c:axId val="2094734556"/>
       </c:barChart>
       <c:catAx>
         <c:axId val="2094734554"/>
@@ -929,6 +897,7 @@
         <c:crosses val="autoZero"/>
         <c:auto val="1"/>
         <c:lblAlgn val="ctr"/>
+        <c:lblOffset val="100"/>
         <c:noMultiLvlLbl val="1"/>
       </c:catAx>
       <c:valAx>
@@ -993,6 +962,7 @@
     </c:plotArea>
     <c:plotVisOnly val="1"/>
     <c:dispBlanksAs val="span"/>
+    <c:showDLblsOverMax val="1"/>
   </c:chart>
   <c:spPr>
     <a:solidFill>
@@ -1031,234 +1001,10 @@
           <a:chExt cx="0" cy="0"/>
         </a:xfrm>
       </p:grpSpPr>
-      <p:sp>
-        <p:nvSpPr>
-          <p:cNvPr id="2" name="Header Placeholder 1"/>
-          <p:cNvSpPr>
-            <a:spLocks noGrp="1"/>
-          </p:cNvSpPr>
-          <p:nvPr>
-            <p:ph type="hdr" sz="quarter"/>
-          </p:nvPr>
-        </p:nvSpPr>
-        <p:spPr>
-          <a:xfrm>
-            <a:off x="0" y="0"/>
-            <a:ext cx="2971800" cy="458788"/>
-          </a:xfrm>
-          <a:prstGeom prst="rect">
-            <a:avLst/>
-          </a:prstGeom>
-        </p:spPr>
-        <p:txBody>
-          <a:bodyPr vert="horz" lIns="91440" tIns="45720" rIns="91440" bIns="45720" rtlCol="0"/>
-          <a:lstStyle>
-            <a:lvl1pPr algn="l">
-              <a:defRPr sz="1200"/>
-            </a:lvl1pPr>
-          </a:lstStyle>
-          <a:p>
-            <a:endParaRPr lang="en-US"/>
-          </a:p>
-        </p:txBody>
-      </p:sp>
-      <p:sp>
-        <p:nvSpPr>
-          <p:cNvPr id="3" name="Date Placeholder 2"/>
-          <p:cNvSpPr>
-            <a:spLocks noGrp="1"/>
-          </p:cNvSpPr>
-          <p:nvPr>
-            <p:ph type="dt" idx="1"/>
-          </p:nvPr>
-        </p:nvSpPr>
-        <p:spPr>
-          <a:xfrm>
-            <a:off x="3884613" y="0"/>
-            <a:ext cx="2971800" cy="458788"/>
-          </a:xfrm>
-          <a:prstGeom prst="rect">
-            <a:avLst/>
-          </a:prstGeom>
-        </p:spPr>
-        <p:txBody>
-          <a:bodyPr vert="horz" lIns="91440" tIns="45720" rIns="91440" bIns="45720" rtlCol="0"/>
-          <a:lstStyle>
-            <a:lvl1pPr algn="r">
-              <a:defRPr sz="1200"/>
-            </a:lvl1pPr>
-          </a:lstStyle>
-          <a:p>
-            <a:fld id="{5282F153-3F37-0F45-9E97-73ACFA13230C}" type="datetimeFigureOut">
-              <a:rPr lang="en-US"/>
-              <a:t>7/23/19</a:t>
-            </a:fld>
-            <a:endParaRPr lang="en-US"/>
-          </a:p>
-        </p:txBody>
-      </p:sp>
-      <p:sp>
-        <p:nvSpPr>
-          <p:cNvPr id="4" name="Slide Image Placeholder 3"/>
-          <p:cNvSpPr>
-            <a:spLocks noGrp="1" noRot="1" noChangeAspect="1"/>
-          </p:cNvSpPr>
-          <p:nvPr>
-            <p:ph type="sldImg" idx="2"/>
-          </p:nvPr>
-        </p:nvSpPr>
-        <p:spPr>
-          <a:xfrm>
-            <a:off x="685800" y="1143000"/>
-            <a:ext cx="5486400" cy="3086100"/>
-          </a:xfrm>
-          <a:prstGeom prst="rect">
-            <a:avLst/>
-          </a:prstGeom>
-          <a:noFill/>
-          <a:ln w="12700">
-            <a:solidFill>
-              <a:prstClr val="black"/>
-            </a:solidFill>
-          </a:ln>
-        </p:spPr>
-        <p:txBody>
-          <a:bodyPr vert="horz" lIns="91440" tIns="45720" rIns="91440" bIns="45720" rtlCol="0" anchor="ctr"/>
-          <a:lstStyle/>
-          <a:p>
-            <a:endParaRPr lang="en-US"/>
-          </a:p>
-        </p:txBody>
-      </p:sp>
-      <p:sp>
-        <p:nvSpPr>
-          <p:cNvPr id="5" name="Notes Placeholder 4"/>
-          <p:cNvSpPr>
-            <a:spLocks noGrp="1"/>
-          </p:cNvSpPr>
-          <p:nvPr>
-            <p:ph type="body" sz="quarter" idx="3"/>
-          </p:nvPr>
-        </p:nvSpPr>
-        <p:spPr>
-          <a:xfrm>
-            <a:off x="685800" y="4400550"/>
-            <a:ext cx="5486400" cy="3600450"/>
-          </a:xfrm>
-          <a:prstGeom prst="rect">
-            <a:avLst/>
-          </a:prstGeom>
-        </p:spPr>
-        <p:txBody>
-          <a:bodyPr vert="horz" lIns="91440" tIns="45720" rIns="91440" bIns="45720" rtlCol="0"/>
-          <a:lstStyle/>
-          <a:p>
-            <a:pPr lvl="0"/>
-            <a:r>
-              <a:rPr lang="en-US"/>
-              <a:t>Click to edit Master text styles</a:t>
-            </a:r>
-          </a:p>
-          <a:p>
-            <a:pPr lvl="1"/>
-            <a:r>
-              <a:rPr lang="en-US"/>
-              <a:t>Second level</a:t>
-            </a:r>
-          </a:p>
-          <a:p>
-            <a:pPr lvl="2"/>
-            <a:r>
-              <a:rPr lang="en-US"/>
-              <a:t>Third level</a:t>
-            </a:r>
-          </a:p>
-          <a:p>
-            <a:pPr lvl="3"/>
-            <a:r>
-              <a:rPr lang="en-US"/>
-              <a:t>Fourth level</a:t>
-            </a:r>
-          </a:p>
-          <a:p>
-            <a:pPr lvl="4"/>
-            <a:r>
-              <a:rPr lang="en-US"/>
-              <a:t>Fifth level</a:t>
-            </a:r>
-          </a:p>
-        </p:txBody>
-      </p:sp>
-      <p:sp>
-        <p:nvSpPr>
-          <p:cNvPr id="6" name="Footer Placeholder 5"/>
-          <p:cNvSpPr>
-            <a:spLocks noGrp="1"/>
-          </p:cNvSpPr>
-          <p:nvPr>
-            <p:ph type="ftr" sz="quarter" idx="4"/>
-          </p:nvPr>
-        </p:nvSpPr>
-        <p:spPr>
-          <a:xfrm>
-            <a:off x="0" y="8685213"/>
-            <a:ext cx="2971800" cy="458787"/>
-          </a:xfrm>
-          <a:prstGeom prst="rect">
-            <a:avLst/>
-          </a:prstGeom>
-        </p:spPr>
-        <p:txBody>
-          <a:bodyPr vert="horz" lIns="91440" tIns="45720" rIns="91440" bIns="45720" rtlCol="0" anchor="b"/>
-          <a:lstStyle>
-            <a:lvl1pPr algn="l">
-              <a:defRPr sz="1200"/>
-            </a:lvl1pPr>
-          </a:lstStyle>
-          <a:p>
-            <a:endParaRPr lang="en-US"/>
-          </a:p>
-        </p:txBody>
-      </p:sp>
-      <p:sp>
-        <p:nvSpPr>
-          <p:cNvPr id="7" name="Slide Number Placeholder 6"/>
-          <p:cNvSpPr>
-            <a:spLocks noGrp="1"/>
-          </p:cNvSpPr>
-          <p:nvPr>
-            <p:ph type="sldNum" sz="quarter" idx="5"/>
-          </p:nvPr>
-        </p:nvSpPr>
-        <p:spPr>
-          <a:xfrm>
-            <a:off x="3884613" y="8685213"/>
-            <a:ext cx="2971800" cy="458787"/>
-          </a:xfrm>
-          <a:prstGeom prst="rect">
-            <a:avLst/>
-          </a:prstGeom>
-        </p:spPr>
-        <p:txBody>
-          <a:bodyPr vert="horz" lIns="91440" tIns="45720" rIns="91440" bIns="45720" rtlCol="0" anchor="b"/>
-          <a:lstStyle>
-            <a:lvl1pPr algn="r">
-              <a:defRPr sz="1200"/>
-            </a:lvl1pPr>
-          </a:lstStyle>
-          <a:p>
-            <a:fld id="{CE5E9CC1-C706-0F49-92D6-E571CC5EEA8F}" type="slidenum">
-              <a:rPr lang="en-US"/>
-              <a:t>‹#›</a:t>
-            </a:fld>
-            <a:endParaRPr lang="en-US"/>
-          </a:p>
-        </p:txBody>
-      </p:sp>
     </p:spTree>
     <p:extLst>
       <p:ext uri="{BB962C8B-B14F-4D97-AF65-F5344CB8AC3E}">
-        <p14:creationId xmlns:p14="http://schemas.microsoft.com/office/powerpoint/2010/main" val="1024086991"/>
+        <p14:creationId xmlns:p14="http://schemas.microsoft.com/office/powerpoint/2010/main" val="1570425173"/>
       </p:ext>
     </p:extLst>
   </p:cSld>
@@ -1402,10 +1148,6 @@
           <a:bodyPr/>
           <a:lstStyle/>
           <a:p>
-            <a:r>
-              <a:rPr lang="en-US" dirty="0"/>
-              <a:t/>
-            </a:r>
             <a:endParaRPr lang="en-US" dirty="0"/>
           </a:p>
         </p:txBody>
@@ -1490,10 +1232,6 @@
           <a:bodyPr/>
           <a:lstStyle/>
           <a:p>
-            <a:r>
-              <a:rPr lang="en-US" dirty="0"/>
-              <a:t/>
-            </a:r>
             <a:endParaRPr lang="en-US" dirty="0"/>
           </a:p>
         </p:txBody>
@@ -1578,10 +1316,6 @@
           <a:bodyPr/>
           <a:lstStyle/>
           <a:p>
-            <a:r>
-              <a:rPr lang="en-US" dirty="0"/>
-              <a:t/>
-            </a:r>
             <a:endParaRPr lang="en-US" dirty="0"/>
           </a:p>
         </p:txBody>
@@ -1666,10 +1400,6 @@
           <a:bodyPr/>
           <a:lstStyle/>
           <a:p>
-            <a:r>
-              <a:rPr lang="en-US" dirty="0"/>
-              <a:t/>
-            </a:r>
             <a:endParaRPr lang="en-US" dirty="0"/>
           </a:p>
         </p:txBody>
@@ -1754,10 +1484,6 @@
           <a:bodyPr/>
           <a:lstStyle/>
           <a:p>
-            <a:r>
-              <a:rPr lang="en-US" dirty="0"/>
-              <a:t/>
-            </a:r>
             <a:endParaRPr lang="en-US" dirty="0"/>
           </a:p>
         </p:txBody>
@@ -1842,10 +1568,6 @@
           <a:bodyPr/>
           <a:lstStyle/>
           <a:p>
-            <a:r>
-              <a:rPr lang="en-US" dirty="0"/>
-              <a:t/>
-            </a:r>
             <a:endParaRPr lang="en-US" dirty="0"/>
           </a:p>
         </p:txBody>
@@ -1930,10 +1652,6 @@
           <a:bodyPr/>
           <a:lstStyle/>
           <a:p>
-            <a:r>
-              <a:rPr lang="en-US" dirty="0"/>
-              <a:t/>
-            </a:r>
             <a:endParaRPr lang="en-US" dirty="0"/>
           </a:p>
         </p:txBody>
@@ -2018,10 +1736,6 @@
           <a:bodyPr/>
           <a:lstStyle/>
           <a:p>
-            <a:r>
-              <a:rPr lang="en-US" dirty="0"/>
-              <a:t/>
-            </a:r>
             <a:endParaRPr lang="en-US" dirty="0"/>
           </a:p>
         </p:txBody>
@@ -2106,10 +1820,6 @@
           <a:bodyPr/>
           <a:lstStyle/>
           <a:p>
-            <a:r>
-              <a:rPr lang="en-US" dirty="0"/>
-              <a:t/>
-            </a:r>
             <a:endParaRPr lang="en-US" dirty="0"/>
           </a:p>
         </p:txBody>
@@ -2194,10 +1904,6 @@
           <a:bodyPr/>
           <a:lstStyle/>
           <a:p>
-            <a:r>
-              <a:rPr lang="en-US" dirty="0"/>
-              <a:t/>
-            </a:r>
             <a:endParaRPr lang="en-US" dirty="0"/>
           </a:p>
         </p:txBody>
@@ -2282,10 +1988,6 @@
           <a:bodyPr/>
           <a:lstStyle/>
           <a:p>
-            <a:r>
-              <a:rPr lang="en-US" dirty="0"/>
-              <a:t/>
-            </a:r>
             <a:endParaRPr lang="en-US" dirty="0"/>
           </a:p>
         </p:txBody>
@@ -2370,10 +2072,6 @@
           <a:bodyPr/>
           <a:lstStyle/>
           <a:p>
-            <a:r>
-              <a:rPr lang="en-US" dirty="0"/>
-              <a:t/>
-            </a:r>
             <a:endParaRPr lang="en-US" dirty="0"/>
           </a:p>
         </p:txBody>
@@ -2458,10 +2156,6 @@
           <a:bodyPr/>
           <a:lstStyle/>
           <a:p>
-            <a:r>
-              <a:rPr lang="en-US" dirty="0"/>
-              <a:t/>
-            </a:r>
             <a:endParaRPr lang="en-US" dirty="0"/>
           </a:p>
         </p:txBody>
@@ -2546,10 +2240,6 @@
           <a:bodyPr/>
           <a:lstStyle/>
           <a:p>
-            <a:r>
-              <a:rPr lang="en-US" dirty="0"/>
-              <a:t/>
-            </a:r>
             <a:endParaRPr lang="en-US" dirty="0"/>
           </a:p>
         </p:txBody>
@@ -2623,6 +2313,11 @@
 <file path=ppt/slideMasters/slideMaster1.xml><?xml version="1.0" encoding="utf-8"?>
 <p:sldMaster xmlns:a="http://schemas.openxmlformats.org/drawingml/2006/main" xmlns:r="http://schemas.openxmlformats.org/officeDocument/2006/relationships" xmlns:p="http://schemas.openxmlformats.org/presentationml/2006/main">
   <p:cSld>
+    <p:bg>
+      <p:bgRef idx="1001">
+        <a:schemeClr val="bg1"/>
+      </p:bgRef>
+    </p:bg>
     <p:spTree>
       <p:nvGrpSpPr>
         <p:cNvPr id="1" name=""/>
@@ -2905,6 +2600,7 @@
         <a:solidFill>
           <a:srgbClr val="0F172A"/>
         </a:solidFill>
+        <a:effectLst/>
       </p:bgPr>
     </p:bg>
     <p:spTree>
@@ -2983,14 +2679,14 @@
       </p:sp>
       <p:pic>
         <p:nvPicPr>
-          <p:cNvPr id="5" name="Image 0" descr="preencoded.png">    </p:cNvPr>
+          <p:cNvPr id="5" name="Image 0" descr="preencoded.png"/>
           <p:cNvPicPr>
             <a:picLocks noChangeAspect="1"/>
           </p:cNvPicPr>
           <p:nvPr/>
         </p:nvPicPr>
         <p:blipFill>
-          <a:blip r:embed="rId1"/>
+          <a:blip r:embed="rId3"/>
           <a:stretch>
             <a:fillRect/>
           </a:stretch>
@@ -3026,7 +2722,7 @@
           <a:bodyPr wrap="square" lIns="0" tIns="0" rIns="0" bIns="0" rtlCol="0" anchor="ctr"/>
           <a:lstStyle/>
           <a:p>
-            <a:pPr indent="0" marL="0">
+            <a:pPr marL="0" indent="0">
               <a:lnSpc>
                 <a:spcPct val="110000"/>
               </a:lnSpc>
@@ -3046,7 +2742,7 @@
             <a:endParaRPr lang="en-US" sz="3400" dirty="0"/>
           </a:p>
           <a:p>
-            <a:pPr indent="0" marL="0">
+            <a:pPr marL="0" indent="0">
               <a:lnSpc>
                 <a:spcPct val="110000"/>
               </a:lnSpc>
@@ -3088,7 +2784,7 @@
           <a:bodyPr wrap="square" lIns="0" tIns="0" rIns="0" bIns="0" rtlCol="0" anchor="ctr"/>
           <a:lstStyle/>
           <a:p>
-            <a:pPr indent="0" marL="0">
+            <a:pPr marL="0" indent="0">
               <a:buNone/>
             </a:pPr>
             <a:r>
@@ -3127,7 +2823,7 @@
           <a:bodyPr wrap="square" lIns="0" tIns="0" rIns="0" bIns="0" rtlCol="0" anchor="ctr"/>
           <a:lstStyle/>
           <a:p>
-            <a:pPr indent="0" marL="0">
+            <a:pPr marL="0" indent="0">
               <a:buNone/>
             </a:pPr>
             <a:r>
@@ -3161,6 +2857,7 @@
         <a:solidFill>
           <a:srgbClr val="F0F9FF"/>
         </a:solidFill>
+        <a:effectLst/>
       </p:bgPr>
     </p:bg>
     <p:spTree>
@@ -3218,7 +2915,7 @@
           <a:bodyPr wrap="square" lIns="0" tIns="0" rIns="0" bIns="0" rtlCol="0" anchor="ctr"/>
           <a:lstStyle/>
           <a:p>
-            <a:pPr indent="0" marL="0">
+            <a:pPr marL="0" indent="0">
               <a:buNone/>
             </a:pPr>
             <a:r>
@@ -3238,14 +2935,14 @@
       </p:sp>
       <p:pic>
         <p:nvPicPr>
-          <p:cNvPr id="4" name="Image 0" descr="preencoded.png">    </p:cNvPr>
+          <p:cNvPr id="4" name="Image 0" descr="preencoded.png"/>
           <p:cNvPicPr>
             <a:picLocks noChangeAspect="1"/>
           </p:cNvPicPr>
           <p:nvPr/>
         </p:nvPicPr>
         <p:blipFill>
-          <a:blip r:embed="rId1"/>
+          <a:blip r:embed="rId3"/>
           <a:stretch>
             <a:fillRect/>
           </a:stretch>
@@ -3281,7 +2978,7 @@
           <a:bodyPr wrap="square" lIns="0" tIns="0" rIns="0" bIns="0" rtlCol="0" anchor="ctr"/>
           <a:lstStyle/>
           <a:p>
-            <a:pPr indent="0" marL="0">
+            <a:pPr marL="0" indent="0">
               <a:buNone/>
             </a:pPr>
             <a:r>
@@ -3340,7 +3037,7 @@
           <a:bodyPr wrap="square" lIns="0" tIns="0" rIns="0" bIns="0" rtlCol="0" anchor="ctr"/>
           <a:lstStyle/>
           <a:p>
-            <a:pPr algn="ctr" indent="0" marL="0">
+            <a:pPr marL="0" indent="0" algn="ctr">
               <a:buNone/>
             </a:pPr>
             <a:r>
@@ -3379,7 +3076,7 @@
           <a:bodyPr wrap="square" lIns="0" tIns="0" rIns="0" bIns="0" rtlCol="0" anchor="ctr"/>
           <a:lstStyle/>
           <a:p>
-            <a:pPr algn="ctr" indent="0" marL="0">
+            <a:pPr marL="0" indent="0" algn="ctr">
               <a:buNone/>
             </a:pPr>
             <a:r>
@@ -3418,7 +3115,7 @@
           <a:bodyPr wrap="square" lIns="0" tIns="0" rIns="0" bIns="0" rtlCol="0" anchor="ctr"/>
           <a:lstStyle/>
           <a:p>
-            <a:pPr algn="ctr" indent="0" marL="0">
+            <a:pPr marL="0" indent="0" algn="ctr">
               <a:buNone/>
             </a:pPr>
             <a:r>
@@ -3474,7 +3171,7 @@
           <a:bodyPr wrap="square" lIns="0" tIns="0" rIns="0" bIns="0" rtlCol="0" anchor="ctr"/>
           <a:lstStyle/>
           <a:p>
-            <a:pPr algn="ctr" indent="0" marL="0">
+            <a:pPr marL="0" indent="0" algn="ctr">
               <a:buNone/>
             </a:pPr>
             <a:r>
@@ -3513,7 +3210,7 @@
           <a:bodyPr wrap="square" lIns="0" tIns="0" rIns="0" bIns="0" rtlCol="0" anchor="ctr"/>
           <a:lstStyle/>
           <a:p>
-            <a:pPr algn="ctr" indent="0" marL="0">
+            <a:pPr marL="0" indent="0" algn="ctr">
               <a:buNone/>
             </a:pPr>
             <a:r>
@@ -3552,7 +3249,7 @@
           <a:bodyPr wrap="square" lIns="0" tIns="0" rIns="0" bIns="0" rtlCol="0" anchor="ctr"/>
           <a:lstStyle/>
           <a:p>
-            <a:pPr algn="ctr" indent="0" marL="0">
+            <a:pPr marL="0" indent="0" algn="ctr">
               <a:buNone/>
             </a:pPr>
             <a:r>
@@ -3608,7 +3305,7 @@
           <a:bodyPr wrap="square" lIns="0" tIns="0" rIns="0" bIns="0" rtlCol="0" anchor="ctr"/>
           <a:lstStyle/>
           <a:p>
-            <a:pPr algn="ctr" indent="0" marL="0">
+            <a:pPr marL="0" indent="0" algn="ctr">
               <a:buNone/>
             </a:pPr>
             <a:r>
@@ -3647,7 +3344,7 @@
           <a:bodyPr wrap="square" lIns="0" tIns="0" rIns="0" bIns="0" rtlCol="0" anchor="ctr"/>
           <a:lstStyle/>
           <a:p>
-            <a:pPr algn="ctr" indent="0" marL="0">
+            <a:pPr marL="0" indent="0" algn="ctr">
               <a:buNone/>
             </a:pPr>
             <a:r>
@@ -3686,7 +3383,7 @@
           <a:bodyPr wrap="square" lIns="0" tIns="0" rIns="0" bIns="0" rtlCol="0" anchor="ctr"/>
           <a:lstStyle/>
           <a:p>
-            <a:pPr algn="ctr" indent="0" marL="0">
+            <a:pPr marL="0" indent="0" algn="ctr">
               <a:buNone/>
             </a:pPr>
             <a:r>
@@ -3742,7 +3439,7 @@
           <a:bodyPr wrap="square" lIns="0" tIns="0" rIns="0" bIns="0" rtlCol="0" anchor="ctr"/>
           <a:lstStyle/>
           <a:p>
-            <a:pPr algn="ctr" indent="0" marL="0">
+            <a:pPr marL="0" indent="0" algn="ctr">
               <a:buNone/>
             </a:pPr>
             <a:r>
@@ -3781,7 +3478,7 @@
           <a:bodyPr wrap="square" lIns="0" tIns="0" rIns="0" bIns="0" rtlCol="0" anchor="ctr"/>
           <a:lstStyle/>
           <a:p>
-            <a:pPr algn="ctr" indent="0" marL="0">
+            <a:pPr marL="0" indent="0" algn="ctr">
               <a:buNone/>
             </a:pPr>
             <a:r>
@@ -3801,7 +3498,7 @@
       </p:sp>
       <p:graphicFrame>
         <p:nvGraphicFramePr>
-          <p:cNvPr id="11" name="Table 0"/>
+          <p:cNvPr id="21" name="Table 0"/>
           <p:cNvGraphicFramePr>
             <a:graphicFrameLocks noGrp="1"/>
           </p:cNvGraphicFramePr>
@@ -3822,9 +3519,27 @@
             <a:tbl>
               <a:tblPr/>
               <a:tblGrid>
-                <a:gridCol w="2286000"/>
-                <a:gridCol w="3657600"/>
-                <a:gridCol w="2286000"/>
+                <a:gridCol w="2286000">
+                  <a:extLst>
+                    <a:ext uri="{9D8B030D-6E8A-4147-A177-3AD203B41FA5}">
+                      <a16:colId xmlns:a16="http://schemas.microsoft.com/office/drawing/2014/main" val="20000"/>
+                    </a:ext>
+                  </a:extLst>
+                </a:gridCol>
+                <a:gridCol w="3657600">
+                  <a:extLst>
+                    <a:ext uri="{9D8B030D-6E8A-4147-A177-3AD203B41FA5}">
+                      <a16:colId xmlns:a16="http://schemas.microsoft.com/office/drawing/2014/main" val="20001"/>
+                    </a:ext>
+                  </a:extLst>
+                </a:gridCol>
+                <a:gridCol w="2286000">
+                  <a:extLst>
+                    <a:ext uri="{9D8B030D-6E8A-4147-A177-3AD203B41FA5}">
+                      <a16:colId xmlns:a16="http://schemas.microsoft.com/office/drawing/2014/main" val="20002"/>
+                    </a:ext>
+                  </a:extLst>
+                </a:gridCol>
               </a:tblGrid>
               <a:tr h="274320">
                 <a:tc>
@@ -3832,7 +3547,7 @@
                     <a:bodyPr/>
                     <a:lstStyle/>
                     <a:p>
-                      <a:pPr indent="0" marL="0">
+                      <a:pPr marL="0" indent="0">
                         <a:buNone/>
                       </a:pPr>
                       <a:r>
@@ -3853,7 +3568,7 @@
                       </a:endParaRPr>
                     </a:p>
                   </a:txBody>
-                  <a:tcPr marL="91440" marR="91440" marT="45720" marB="45720">
+                  <a:tcPr>
                     <a:lnL w="6350" cap="flat" cmpd="sng" algn="ctr">
                       <a:solidFill>
                         <a:srgbClr val="E2E8F0"/>
@@ -3900,7 +3615,7 @@
                     <a:bodyPr/>
                     <a:lstStyle/>
                     <a:p>
-                      <a:pPr indent="0" marL="0">
+                      <a:pPr marL="0" indent="0">
                         <a:buNone/>
                       </a:pPr>
                       <a:r>
@@ -3921,7 +3636,7 @@
                       </a:endParaRPr>
                     </a:p>
                   </a:txBody>
-                  <a:tcPr marL="91440" marR="91440" marT="45720" marB="45720">
+                  <a:tcPr>
                     <a:lnL w="6350" cap="flat" cmpd="sng" algn="ctr">
                       <a:solidFill>
                         <a:srgbClr val="E2E8F0"/>
@@ -3968,7 +3683,7 @@
                     <a:bodyPr/>
                     <a:lstStyle/>
                     <a:p>
-                      <a:pPr indent="0" marL="0">
+                      <a:pPr marL="0" indent="0">
                         <a:buNone/>
                       </a:pPr>
                       <a:r>
@@ -3989,7 +3704,7 @@
                       </a:endParaRPr>
                     </a:p>
                   </a:txBody>
-                  <a:tcPr marL="91440" marR="91440" marT="45720" marB="45720">
+                  <a:tcPr>
                     <a:lnL w="6350" cap="flat" cmpd="sng" algn="ctr">
                       <a:solidFill>
                         <a:srgbClr val="E2E8F0"/>
@@ -4031,6 +3746,11 @@
                     </a:solidFill>
                   </a:tcPr>
                 </a:tc>
+                <a:extLst>
+                  <a:ext uri="{0D108BD9-81ED-4DB2-BD59-A6C34878D82A}">
+                    <a16:rowId xmlns:a16="http://schemas.microsoft.com/office/drawing/2014/main" val="10000"/>
+                  </a:ext>
+                </a:extLst>
               </a:tr>
               <a:tr h="274320">
                 <a:tc>
@@ -4038,7 +3758,7 @@
                     <a:bodyPr/>
                     <a:lstStyle/>
                     <a:p>
-                      <a:pPr indent="0" marL="0">
+                      <a:pPr marL="0" indent="0">
                         <a:buNone/>
                       </a:pPr>
                       <a:r>
@@ -4059,7 +3779,7 @@
                       </a:endParaRPr>
                     </a:p>
                   </a:txBody>
-                  <a:tcPr marL="91440" marR="91440" marT="45720" marB="45720">
+                  <a:tcPr>
                     <a:lnL w="6350" cap="flat" cmpd="sng" algn="ctr">
                       <a:solidFill>
                         <a:srgbClr val="E2E8F0"/>
@@ -4103,7 +3823,7 @@
                     <a:bodyPr/>
                     <a:lstStyle/>
                     <a:p>
-                      <a:pPr indent="0" marL="0">
+                      <a:pPr marL="0" indent="0">
                         <a:buNone/>
                       </a:pPr>
                       <a:r>
@@ -4124,7 +3844,7 @@
                       </a:endParaRPr>
                     </a:p>
                   </a:txBody>
-                  <a:tcPr marL="91440" marR="91440" marT="45720" marB="45720">
+                  <a:tcPr>
                     <a:lnL w="6350" cap="flat" cmpd="sng" algn="ctr">
                       <a:solidFill>
                         <a:srgbClr val="E2E8F0"/>
@@ -4168,7 +3888,7 @@
                     <a:bodyPr/>
                     <a:lstStyle/>
                     <a:p>
-                      <a:pPr indent="0" marL="0">
+                      <a:pPr marL="0" indent="0">
                         <a:buNone/>
                       </a:pPr>
                       <a:r>
@@ -4189,7 +3909,7 @@
                       </a:endParaRPr>
                     </a:p>
                   </a:txBody>
-                  <a:tcPr marL="91440" marR="91440" marT="45720" marB="45720">
+                  <a:tcPr>
                     <a:lnL w="6350" cap="flat" cmpd="sng" algn="ctr">
                       <a:solidFill>
                         <a:srgbClr val="E2E8F0"/>
@@ -4228,6 +3948,11 @@
                     </a:lnB>
                   </a:tcPr>
                 </a:tc>
+                <a:extLst>
+                  <a:ext uri="{0D108BD9-81ED-4DB2-BD59-A6C34878D82A}">
+                    <a16:rowId xmlns:a16="http://schemas.microsoft.com/office/drawing/2014/main" val="10001"/>
+                  </a:ext>
+                </a:extLst>
               </a:tr>
               <a:tr h="274320">
                 <a:tc>
@@ -4235,7 +3960,7 @@
                     <a:bodyPr/>
                     <a:lstStyle/>
                     <a:p>
-                      <a:pPr indent="0" marL="0">
+                      <a:pPr marL="0" indent="0">
                         <a:buNone/>
                       </a:pPr>
                       <a:r>
@@ -4256,7 +3981,7 @@
                       </a:endParaRPr>
                     </a:p>
                   </a:txBody>
-                  <a:tcPr marL="91440" marR="91440" marT="45720" marB="45720">
+                  <a:tcPr>
                     <a:lnL w="6350" cap="flat" cmpd="sng" algn="ctr">
                       <a:solidFill>
                         <a:srgbClr val="E2E8F0"/>
@@ -4300,7 +4025,7 @@
                     <a:bodyPr/>
                     <a:lstStyle/>
                     <a:p>
-                      <a:pPr indent="0" marL="0">
+                      <a:pPr marL="0" indent="0">
                         <a:buNone/>
                       </a:pPr>
                       <a:r>
@@ -4321,7 +4046,7 @@
                       </a:endParaRPr>
                     </a:p>
                   </a:txBody>
-                  <a:tcPr marL="91440" marR="91440" marT="45720" marB="45720">
+                  <a:tcPr>
                     <a:lnL w="6350" cap="flat" cmpd="sng" algn="ctr">
                       <a:solidFill>
                         <a:srgbClr val="E2E8F0"/>
@@ -4365,7 +4090,7 @@
                     <a:bodyPr/>
                     <a:lstStyle/>
                     <a:p>
-                      <a:pPr indent="0" marL="0">
+                      <a:pPr marL="0" indent="0">
                         <a:buNone/>
                       </a:pPr>
                       <a:r>
@@ -4386,7 +4111,7 @@
                       </a:endParaRPr>
                     </a:p>
                   </a:txBody>
-                  <a:tcPr marL="91440" marR="91440" marT="45720" marB="45720">
+                  <a:tcPr>
                     <a:lnL w="6350" cap="flat" cmpd="sng" algn="ctr">
                       <a:solidFill>
                         <a:srgbClr val="E2E8F0"/>
@@ -4425,6 +4150,11 @@
                     </a:lnB>
                   </a:tcPr>
                 </a:tc>
+                <a:extLst>
+                  <a:ext uri="{0D108BD9-81ED-4DB2-BD59-A6C34878D82A}">
+                    <a16:rowId xmlns:a16="http://schemas.microsoft.com/office/drawing/2014/main" val="10002"/>
+                  </a:ext>
+                </a:extLst>
               </a:tr>
               <a:tr h="274320">
                 <a:tc>
@@ -4432,7 +4162,7 @@
                     <a:bodyPr/>
                     <a:lstStyle/>
                     <a:p>
-                      <a:pPr indent="0" marL="0">
+                      <a:pPr marL="0" indent="0">
                         <a:buNone/>
                       </a:pPr>
                       <a:r>
@@ -4453,7 +4183,7 @@
                       </a:endParaRPr>
                     </a:p>
                   </a:txBody>
-                  <a:tcPr marL="91440" marR="91440" marT="45720" marB="45720">
+                  <a:tcPr>
                     <a:lnL w="6350" cap="flat" cmpd="sng" algn="ctr">
                       <a:solidFill>
                         <a:srgbClr val="E2E8F0"/>
@@ -4497,7 +4227,7 @@
                     <a:bodyPr/>
                     <a:lstStyle/>
                     <a:p>
-                      <a:pPr indent="0" marL="0">
+                      <a:pPr marL="0" indent="0">
                         <a:buNone/>
                       </a:pPr>
                       <a:r>
@@ -4518,7 +4248,7 @@
                       </a:endParaRPr>
                     </a:p>
                   </a:txBody>
-                  <a:tcPr marL="91440" marR="91440" marT="45720" marB="45720">
+                  <a:tcPr>
                     <a:lnL w="6350" cap="flat" cmpd="sng" algn="ctr">
                       <a:solidFill>
                         <a:srgbClr val="E2E8F0"/>
@@ -4562,7 +4292,7 @@
                     <a:bodyPr/>
                     <a:lstStyle/>
                     <a:p>
-                      <a:pPr indent="0" marL="0">
+                      <a:pPr marL="0" indent="0">
                         <a:buNone/>
                       </a:pPr>
                       <a:r>
@@ -4583,7 +4313,7 @@
                       </a:endParaRPr>
                     </a:p>
                   </a:txBody>
-                  <a:tcPr marL="91440" marR="91440" marT="45720" marB="45720">
+                  <a:tcPr>
                     <a:lnL w="6350" cap="flat" cmpd="sng" algn="ctr">
                       <a:solidFill>
                         <a:srgbClr val="E2E8F0"/>
@@ -4622,6 +4352,11 @@
                     </a:lnB>
                   </a:tcPr>
                 </a:tc>
+                <a:extLst>
+                  <a:ext uri="{0D108BD9-81ED-4DB2-BD59-A6C34878D82A}">
+                    <a16:rowId xmlns:a16="http://schemas.microsoft.com/office/drawing/2014/main" val="10003"/>
+                  </a:ext>
+                </a:extLst>
               </a:tr>
               <a:tr h="274320">
                 <a:tc>
@@ -4629,7 +4364,7 @@
                     <a:bodyPr/>
                     <a:lstStyle/>
                     <a:p>
-                      <a:pPr indent="0" marL="0">
+                      <a:pPr marL="0" indent="0">
                         <a:buNone/>
                       </a:pPr>
                       <a:r>
@@ -4650,7 +4385,7 @@
                       </a:endParaRPr>
                     </a:p>
                   </a:txBody>
-                  <a:tcPr marL="91440" marR="91440" marT="45720" marB="45720">
+                  <a:tcPr>
                     <a:lnL w="6350" cap="flat" cmpd="sng" algn="ctr">
                       <a:solidFill>
                         <a:srgbClr val="E2E8F0"/>
@@ -4694,7 +4429,7 @@
                     <a:bodyPr/>
                     <a:lstStyle/>
                     <a:p>
-                      <a:pPr indent="0" marL="0">
+                      <a:pPr marL="0" indent="0">
                         <a:buNone/>
                       </a:pPr>
                       <a:r>
@@ -4715,7 +4450,7 @@
                       </a:endParaRPr>
                     </a:p>
                   </a:txBody>
-                  <a:tcPr marL="91440" marR="91440" marT="45720" marB="45720">
+                  <a:tcPr>
                     <a:lnL w="6350" cap="flat" cmpd="sng" algn="ctr">
                       <a:solidFill>
                         <a:srgbClr val="E2E8F0"/>
@@ -4759,7 +4494,7 @@
                     <a:bodyPr/>
                     <a:lstStyle/>
                     <a:p>
-                      <a:pPr indent="0" marL="0">
+                      <a:pPr marL="0" indent="0">
                         <a:buNone/>
                       </a:pPr>
                       <a:r>
@@ -4780,7 +4515,7 @@
                       </a:endParaRPr>
                     </a:p>
                   </a:txBody>
-                  <a:tcPr marL="91440" marR="91440" marT="45720" marB="45720">
+                  <a:tcPr>
                     <a:lnL w="6350" cap="flat" cmpd="sng" algn="ctr">
                       <a:solidFill>
                         <a:srgbClr val="E2E8F0"/>
@@ -4819,6 +4554,11 @@
                     </a:lnB>
                   </a:tcPr>
                 </a:tc>
+                <a:extLst>
+                  <a:ext uri="{0D108BD9-81ED-4DB2-BD59-A6C34878D82A}">
+                    <a16:rowId xmlns:a16="http://schemas.microsoft.com/office/drawing/2014/main" val="10004"/>
+                  </a:ext>
+                </a:extLst>
               </a:tr>
             </a:tbl>
           </a:graphicData>
@@ -4840,6 +4580,7 @@
         <a:solidFill>
           <a:srgbClr val="F0F9FF"/>
         </a:solidFill>
+        <a:effectLst/>
       </p:bgPr>
     </p:bg>
     <p:spTree>
@@ -4897,7 +4638,7 @@
           <a:bodyPr wrap="square" lIns="0" tIns="0" rIns="0" bIns="0" rtlCol="0" anchor="ctr"/>
           <a:lstStyle/>
           <a:p>
-            <a:pPr indent="0" marL="0">
+            <a:pPr marL="0" indent="0">
               <a:buNone/>
             </a:pPr>
             <a:r>
@@ -4917,7 +4658,7 @@
       </p:sp>
       <p:graphicFrame>
         <p:nvGraphicFramePr>
-          <p:cNvPr id="4" name="Chart 0" descr=""/>
+          <p:cNvPr id="4" name="Chart 0"/>
           <p:cNvGraphicFramePr/>
           <p:nvPr/>
         </p:nvGraphicFramePr>
@@ -4925,9 +4666,9 @@
           <a:off x="457200" y="1005840"/>
           <a:ext cx="5029200" cy="2743200"/>
         </p:xfrm>
-        <a:graphic xmlns:a="http://schemas.openxmlformats.org/drawingml/2006/main">
+        <a:graphic>
           <a:graphicData uri="http://schemas.openxmlformats.org/drawingml/2006/chart">
-            <c:chart xmlns:c="http://schemas.openxmlformats.org/drawingml/2006/chart" r:id="rId1"/>
+            <c:chart xmlns:c="http://schemas.openxmlformats.org/drawingml/2006/chart" xmlns:r="http://schemas.openxmlformats.org/officeDocument/2006/relationships" r:id="rId3"/>
           </a:graphicData>
         </a:graphic>
       </p:graphicFrame>
@@ -4950,7 +4691,7 @@
           </a:solidFill>
           <a:ln/>
           <a:effectLst>
-            <a:outerShdw sx="100000" sy="100000" kx="0" ky="0" algn="bl" rotWithShape="0" blurRad="50800" dist="25400" dir="8100000">
+            <a:outerShdw blurRad="50800" dist="25400" dir="8100000" algn="bl" rotWithShape="0">
               <a:srgbClr val="000000">
                 <a:alpha val="12000"/>
               </a:srgbClr>
@@ -4960,14 +4701,14 @@
       </p:sp>
       <p:pic>
         <p:nvPicPr>
-          <p:cNvPr id="6" name="Image 0" descr="preencoded.png">    </p:cNvPr>
+          <p:cNvPr id="6" name="Image 0" descr="preencoded.png"/>
           <p:cNvPicPr>
             <a:picLocks noChangeAspect="1"/>
           </p:cNvPicPr>
           <p:nvPr/>
         </p:nvPicPr>
         <p:blipFill>
-          <a:blip r:embed="rId2"/>
+          <a:blip r:embed="rId4"/>
           <a:stretch>
             <a:fillRect/>
           </a:stretch>
@@ -5003,7 +4744,7 @@
           <a:bodyPr wrap="square" lIns="0" tIns="0" rIns="0" bIns="0" rtlCol="0" anchor="ctr"/>
           <a:lstStyle/>
           <a:p>
-            <a:pPr indent="0" marL="0">
+            <a:pPr marL="0" indent="0">
               <a:buNone/>
             </a:pPr>
             <a:r>
@@ -5042,7 +4783,7 @@
           <a:bodyPr wrap="square" rtlCol="0" anchor="ctr"/>
           <a:lstStyle/>
           <a:p>
-            <a:pPr indent="0" marL="0">
+            <a:pPr marL="0" indent="0">
               <a:lnSpc>
                 <a:spcPct val="130000"/>
               </a:lnSpc>
@@ -5062,7 +4803,7 @@
             <a:endParaRPr lang="en-US" sz="1100" dirty="0"/>
           </a:p>
           <a:p>
-            <a:pPr indent="0" marL="0">
+            <a:pPr marL="0" indent="0">
               <a:lnSpc>
                 <a:spcPct val="130000"/>
               </a:lnSpc>
@@ -5082,7 +4823,7 @@
             <a:endParaRPr lang="en-US" sz="1100" dirty="0"/>
           </a:p>
           <a:p>
-            <a:pPr indent="0" marL="0">
+            <a:pPr marL="0" indent="0">
               <a:lnSpc>
                 <a:spcPct val="130000"/>
               </a:lnSpc>
@@ -5103,7 +4844,7 @@
             <a:endParaRPr lang="en-US" sz="1100" dirty="0"/>
           </a:p>
           <a:p>
-            <a:pPr indent="0" marL="0">
+            <a:pPr marL="0" indent="0">
               <a:lnSpc>
                 <a:spcPct val="130000"/>
               </a:lnSpc>
@@ -5123,7 +4864,7 @@
             <a:endParaRPr lang="en-US" sz="1100" dirty="0"/>
           </a:p>
           <a:p>
-            <a:pPr indent="0" marL="0">
+            <a:pPr marL="0" indent="0">
               <a:lnSpc>
                 <a:spcPct val="130000"/>
               </a:lnSpc>
@@ -5143,7 +4884,7 @@
             <a:endParaRPr lang="en-US" sz="1100" dirty="0"/>
           </a:p>
           <a:p>
-            <a:pPr indent="0" marL="0">
+            <a:pPr marL="0" indent="0">
               <a:lnSpc>
                 <a:spcPct val="130000"/>
               </a:lnSpc>
@@ -5164,7 +4905,7 @@
             <a:endParaRPr lang="en-US" sz="1100" dirty="0"/>
           </a:p>
           <a:p>
-            <a:pPr indent="0" marL="0">
+            <a:pPr marL="0" indent="0">
               <a:lnSpc>
                 <a:spcPct val="130000"/>
               </a:lnSpc>
@@ -5184,7 +4925,7 @@
             <a:endParaRPr lang="en-US" sz="1100" dirty="0"/>
           </a:p>
           <a:p>
-            <a:pPr indent="0" marL="0">
+            <a:pPr marL="0" indent="0">
               <a:lnSpc>
                 <a:spcPct val="130000"/>
               </a:lnSpc>
@@ -5224,7 +4965,7 @@
           </a:solidFill>
           <a:ln/>
           <a:effectLst>
-            <a:outerShdw sx="100000" sy="100000" kx="0" ky="0" algn="bl" rotWithShape="0" blurRad="50800" dist="25400" dir="8100000">
+            <a:outerShdw blurRad="50800" dist="25400" dir="8100000" algn="bl" rotWithShape="0">
               <a:srgbClr val="000000">
                 <a:alpha val="12000"/>
               </a:srgbClr>
@@ -5253,7 +4994,7 @@
           <a:bodyPr wrap="square" lIns="0" tIns="0" rIns="0" bIns="0" rtlCol="0" anchor="ctr"/>
           <a:lstStyle/>
           <a:p>
-            <a:pPr indent="0" marL="0">
+            <a:pPr marL="0" indent="0">
               <a:buNone/>
             </a:pPr>
             <a:r>
@@ -5292,7 +5033,7 @@
           <a:bodyPr wrap="square" lIns="0" tIns="0" rIns="0" bIns="0" rtlCol="0" anchor="ctr"/>
           <a:lstStyle/>
           <a:p>
-            <a:pPr indent="0" marL="0">
+            <a:pPr marL="0" indent="0">
               <a:lnSpc>
                 <a:spcPct val="120000"/>
               </a:lnSpc>
@@ -5329,6 +5070,7 @@
         <a:solidFill>
           <a:srgbClr val="F0F9FF"/>
         </a:solidFill>
+        <a:effectLst/>
       </p:bgPr>
     </p:bg>
     <p:spTree>
@@ -5386,7 +5128,7 @@
           <a:bodyPr wrap="square" lIns="0" tIns="0" rIns="0" bIns="0" rtlCol="0" anchor="ctr"/>
           <a:lstStyle/>
           <a:p>
-            <a:pPr indent="0" marL="0">
+            <a:pPr marL="0" indent="0">
               <a:buNone/>
             </a:pPr>
             <a:r>
@@ -5423,7 +5165,7 @@
           </a:solidFill>
           <a:ln/>
           <a:effectLst>
-            <a:outerShdw sx="100000" sy="100000" kx="0" ky="0" algn="bl" rotWithShape="0" blurRad="50800" dist="25400" dir="8100000">
+            <a:outerShdw blurRad="50800" dist="25400" dir="8100000" algn="bl" rotWithShape="0">
               <a:srgbClr val="000000">
                 <a:alpha val="12000"/>
               </a:srgbClr>
@@ -5453,305 +5195,7 @@
       </p:sp>
       <p:pic>
         <p:nvPicPr>
-          <p:cNvPr id="6" name="Image 0" descr="preencoded.png">    </p:cNvPr>
-          <p:cNvPicPr>
-            <a:picLocks noChangeAspect="1"/>
-          </p:cNvPicPr>
-          <p:nvPr/>
-        </p:nvPicPr>
-        <p:blipFill>
-          <a:blip r:embed="rId1"/>
-          <a:stretch>
-            <a:fillRect/>
-          </a:stretch>
-        </p:blipFill>
-        <p:spPr>
-          <a:xfrm>
-            <a:off x="640080" y="1188720"/>
-            <a:ext cx="274320" cy="274320"/>
-          </a:xfrm>
-          <a:prstGeom prst="rect">
-            <a:avLst/>
-          </a:prstGeom>
-        </p:spPr>
-      </p:pic>
-      <p:sp>
-        <p:nvSpPr>
-          <p:cNvPr id="7" name="Text 4"/>
-          <p:cNvSpPr/>
-          <p:nvPr/>
-        </p:nvSpPr>
-        <p:spPr>
-          <a:xfrm>
-            <a:off x="1051560" y="1097280"/>
-            <a:ext cx="3200400" cy="274320"/>
-          </a:xfrm>
-          <a:prstGeom prst="rect">
-            <a:avLst/>
-          </a:prstGeom>
-          <a:noFill/>
-          <a:ln/>
-        </p:spPr>
-        <p:txBody>
-          <a:bodyPr wrap="square" lIns="0" tIns="0" rIns="0" bIns="0" rtlCol="0" anchor="ctr"/>
-          <a:lstStyle/>
-          <a:p>
-            <a:pPr indent="0" marL="0">
-              <a:buNone/>
-            </a:pPr>
-            <a:r>
-              <a:rPr lang="en-US" sz="1300" b="1" dirty="0">
-                <a:solidFill>
-                  <a:srgbClr val="0B1D3A"/>
-                </a:solidFill>
-                <a:latin typeface="Trebuchet MS" pitchFamily="34" charset="0"/>
-                <a:ea typeface="Trebuchet MS" pitchFamily="34" charset="-122"/>
-                <a:cs typeface="Trebuchet MS" pitchFamily="34" charset="-120"/>
-              </a:rPr>
-              <a:t>Landing success is predictable</a:t>
-            </a:r>
-            <a:endParaRPr lang="en-US" sz="1300" dirty="0"/>
-          </a:p>
-        </p:txBody>
-      </p:sp>
-      <p:sp>
-        <p:nvSpPr>
-          <p:cNvPr id="8" name="Text 5"/>
-          <p:cNvSpPr/>
-          <p:nvPr/>
-        </p:nvSpPr>
-        <p:spPr>
-          <a:xfrm>
-            <a:off x="1051560" y="1371600"/>
-            <a:ext cx="7406640" cy="274320"/>
-          </a:xfrm>
-          <a:prstGeom prst="rect">
-            <a:avLst/>
-          </a:prstGeom>
-          <a:noFill/>
-          <a:ln/>
-        </p:spPr>
-        <p:txBody>
-          <a:bodyPr wrap="square" lIns="0" tIns="0" rIns="0" bIns="0" rtlCol="0" anchor="ctr"/>
-          <a:lstStyle/>
-          <a:p>
-            <a:pPr indent="0" marL="0">
-              <a:buNone/>
-            </a:pPr>
-            <a:r>
-              <a:rPr lang="en-US" sz="1100" dirty="0">
-                <a:solidFill>
-                  <a:srgbClr val="0F172A"/>
-                </a:solidFill>
-                <a:latin typeface="Calibri" pitchFamily="34" charset="0"/>
-                <a:ea typeface="Calibri" pitchFamily="34" charset="-122"/>
-                <a:cs typeface="Calibri" pitchFamily="34" charset="-120"/>
-              </a:rPr>
-              <a:t>ML models achieve up to 83.3% accuracy using launch parameters alone, proving that first-stage recovery can be modeled effectively.</a:t>
-            </a:r>
-            <a:endParaRPr lang="en-US" sz="1100" dirty="0"/>
-          </a:p>
-        </p:txBody>
-      </p:sp>
-      <p:sp>
-        <p:nvSpPr>
-          <p:cNvPr id="9" name="Shape 6"/>
-          <p:cNvSpPr/>
-          <p:nvPr/>
-        </p:nvSpPr>
-        <p:spPr>
-          <a:xfrm>
-            <a:off x="457200" y="1828800"/>
-            <a:ext cx="8229600" cy="640080"/>
-          </a:xfrm>
-          <a:prstGeom prst="rect">
-            <a:avLst/>
-          </a:prstGeom>
-          <a:solidFill>
-            <a:srgbClr val="FFFFFF"/>
-          </a:solidFill>
-          <a:ln/>
-          <a:effectLst>
-            <a:outerShdw sx="100000" sy="100000" kx="0" ky="0" algn="bl" rotWithShape="0" blurRad="50800" dist="25400" dir="8100000">
-              <a:srgbClr val="000000">
-                <a:alpha val="12000"/>
-              </a:srgbClr>
-            </a:outerShdw>
-          </a:effectLst>
-        </p:spPr>
-      </p:sp>
-      <p:sp>
-        <p:nvSpPr>
-          <p:cNvPr id="10" name="Shape 7"/>
-          <p:cNvSpPr/>
-          <p:nvPr/>
-        </p:nvSpPr>
-        <p:spPr>
-          <a:xfrm>
-            <a:off x="457200" y="1828800"/>
-            <a:ext cx="54864" cy="640080"/>
-          </a:xfrm>
-          <a:prstGeom prst="rect">
-            <a:avLst/>
-          </a:prstGeom>
-          <a:solidFill>
-            <a:srgbClr val="0891B2"/>
-          </a:solidFill>
-          <a:ln/>
-        </p:spPr>
-      </p:sp>
-      <p:pic>
-        <p:nvPicPr>
-          <p:cNvPr id="11" name="Image 1" descr="preencoded.png">    </p:cNvPr>
-          <p:cNvPicPr>
-            <a:picLocks noChangeAspect="1"/>
-          </p:cNvPicPr>
-          <p:nvPr/>
-        </p:nvPicPr>
-        <p:blipFill>
-          <a:blip r:embed="rId2"/>
-          <a:stretch>
-            <a:fillRect/>
-          </a:stretch>
-        </p:blipFill>
-        <p:spPr>
-          <a:xfrm>
-            <a:off x="640080" y="1965960"/>
-            <a:ext cx="274320" cy="274320"/>
-          </a:xfrm>
-          <a:prstGeom prst="rect">
-            <a:avLst/>
-          </a:prstGeom>
-        </p:spPr>
-      </p:pic>
-      <p:sp>
-        <p:nvSpPr>
-          <p:cNvPr id="12" name="Text 8"/>
-          <p:cNvSpPr/>
-          <p:nvPr/>
-        </p:nvSpPr>
-        <p:spPr>
-          <a:xfrm>
-            <a:off x="1051560" y="1874520"/>
-            <a:ext cx="3200400" cy="274320"/>
-          </a:xfrm>
-          <a:prstGeom prst="rect">
-            <a:avLst/>
-          </a:prstGeom>
-          <a:noFill/>
-          <a:ln/>
-        </p:spPr>
-        <p:txBody>
-          <a:bodyPr wrap="square" lIns="0" tIns="0" rIns="0" bIns="0" rtlCol="0" anchor="ctr"/>
-          <a:lstStyle/>
-          <a:p>
-            <a:pPr indent="0" marL="0">
-              <a:buNone/>
-            </a:pPr>
-            <a:r>
-              <a:rPr lang="en-US" sz="1300" b="1" dirty="0">
-                <a:solidFill>
-                  <a:srgbClr val="0B1D3A"/>
-                </a:solidFill>
-                <a:latin typeface="Trebuchet MS" pitchFamily="34" charset="0"/>
-                <a:ea typeface="Trebuchet MS" pitchFamily="34" charset="-122"/>
-                <a:cs typeface="Trebuchet MS" pitchFamily="34" charset="-120"/>
-              </a:rPr>
-              <a:t>Success rate is improving</a:t>
-            </a:r>
-            <a:endParaRPr lang="en-US" sz="1300" dirty="0"/>
-          </a:p>
-        </p:txBody>
-      </p:sp>
-      <p:sp>
-        <p:nvSpPr>
-          <p:cNvPr id="13" name="Text 9"/>
-          <p:cNvSpPr/>
-          <p:nvPr/>
-        </p:nvSpPr>
-        <p:spPr>
-          <a:xfrm>
-            <a:off x="1051560" y="2148840"/>
-            <a:ext cx="7406640" cy="274320"/>
-          </a:xfrm>
-          <a:prstGeom prst="rect">
-            <a:avLst/>
-          </a:prstGeom>
-          <a:noFill/>
-          <a:ln/>
-        </p:spPr>
-        <p:txBody>
-          <a:bodyPr wrap="square" lIns="0" tIns="0" rIns="0" bIns="0" rtlCol="0" anchor="ctr"/>
-          <a:lstStyle/>
-          <a:p>
-            <a:pPr indent="0" marL="0">
-              <a:buNone/>
-            </a:pPr>
-            <a:r>
-              <a:rPr lang="en-US" sz="1100" dirty="0">
-                <a:solidFill>
-                  <a:srgbClr val="0F172A"/>
-                </a:solidFill>
-                <a:latin typeface="Calibri" pitchFamily="34" charset="0"/>
-                <a:ea typeface="Calibri" pitchFamily="34" charset="-122"/>
-                <a:cs typeface="Calibri" pitchFamily="34" charset="-120"/>
-              </a:rPr>
-              <a:t>From 0% in 2010 to 93% in 2020 — SpaceX has dramatically improved its landing technology over time.</a:t>
-            </a:r>
-            <a:endParaRPr lang="en-US" sz="1100" dirty="0"/>
-          </a:p>
-        </p:txBody>
-      </p:sp>
-      <p:sp>
-        <p:nvSpPr>
-          <p:cNvPr id="14" name="Shape 10"/>
-          <p:cNvSpPr/>
-          <p:nvPr/>
-        </p:nvSpPr>
-        <p:spPr>
-          <a:xfrm>
-            <a:off x="457200" y="2606040"/>
-            <a:ext cx="8229600" cy="640080"/>
-          </a:xfrm>
-          <a:prstGeom prst="rect">
-            <a:avLst/>
-          </a:prstGeom>
-          <a:solidFill>
-            <a:srgbClr val="FFFFFF"/>
-          </a:solidFill>
-          <a:ln/>
-          <a:effectLst>
-            <a:outerShdw sx="100000" sy="100000" kx="0" ky="0" algn="bl" rotWithShape="0" blurRad="50800" dist="25400" dir="8100000">
-              <a:srgbClr val="000000">
-                <a:alpha val="12000"/>
-              </a:srgbClr>
-            </a:outerShdw>
-          </a:effectLst>
-        </p:spPr>
-      </p:sp>
-      <p:sp>
-        <p:nvSpPr>
-          <p:cNvPr id="15" name="Shape 11"/>
-          <p:cNvSpPr/>
-          <p:nvPr/>
-        </p:nvSpPr>
-        <p:spPr>
-          <a:xfrm>
-            <a:off x="457200" y="2606040"/>
-            <a:ext cx="54864" cy="640080"/>
-          </a:xfrm>
-          <a:prstGeom prst="rect">
-            <a:avLst/>
-          </a:prstGeom>
-          <a:solidFill>
-            <a:srgbClr val="0891B2"/>
-          </a:solidFill>
-          <a:ln/>
-        </p:spPr>
-      </p:sp>
-      <p:pic>
-        <p:nvPicPr>
-          <p:cNvPr id="16" name="Image 2" descr="preencoded.png">    </p:cNvPr>
+          <p:cNvPr id="6" name="Image 0" descr="preencoded.png"/>
           <p:cNvPicPr>
             <a:picLocks noChangeAspect="1"/>
           </p:cNvPicPr>
@@ -5765,7 +5209,7 @@
         </p:blipFill>
         <p:spPr>
           <a:xfrm>
-            <a:off x="640080" y="2743200"/>
+            <a:off x="640080" y="1188720"/>
             <a:ext cx="274320" cy="274320"/>
           </a:xfrm>
           <a:prstGeom prst="rect">
@@ -5775,13 +5219,13 @@
       </p:pic>
       <p:sp>
         <p:nvSpPr>
-          <p:cNvPr id="17" name="Text 12"/>
-          <p:cNvSpPr/>
-          <p:nvPr/>
-        </p:nvSpPr>
-        <p:spPr>
-          <a:xfrm>
-            <a:off x="1051560" y="2651760"/>
+          <p:cNvPr id="7" name="Text 4"/>
+          <p:cNvSpPr/>
+          <p:nvPr/>
+        </p:nvSpPr>
+        <p:spPr>
+          <a:xfrm>
+            <a:off x="1051560" y="1097280"/>
             <a:ext cx="3200400" cy="274320"/>
           </a:xfrm>
           <a:prstGeom prst="rect">
@@ -5794,7 +5238,7 @@
           <a:bodyPr wrap="square" lIns="0" tIns="0" rIns="0" bIns="0" rtlCol="0" anchor="ctr"/>
           <a:lstStyle/>
           <a:p>
-            <a:pPr indent="0" marL="0">
+            <a:pPr marL="0" indent="0">
               <a:buNone/>
             </a:pPr>
             <a:r>
@@ -5806,7 +5250,7 @@
                 <a:ea typeface="Trebuchet MS" pitchFamily="34" charset="-122"/>
                 <a:cs typeface="Trebuchet MS" pitchFamily="34" charset="-120"/>
               </a:rPr>
-              <a:t>Launch site matters</a:t>
+              <a:t>Landing success is predictable</a:t>
             </a:r>
             <a:endParaRPr lang="en-US" sz="1300" dirty="0"/>
           </a:p>
@@ -5814,13 +5258,13 @@
       </p:sp>
       <p:sp>
         <p:nvSpPr>
-          <p:cNvPr id="18" name="Text 13"/>
-          <p:cNvSpPr/>
-          <p:nvPr/>
-        </p:nvSpPr>
-        <p:spPr>
-          <a:xfrm>
-            <a:off x="1051560" y="2926080"/>
+          <p:cNvPr id="8" name="Text 5"/>
+          <p:cNvSpPr/>
+          <p:nvPr/>
+        </p:nvSpPr>
+        <p:spPr>
+          <a:xfrm>
+            <a:off x="1051560" y="1371600"/>
             <a:ext cx="7406640" cy="274320"/>
           </a:xfrm>
           <a:prstGeom prst="rect">
@@ -5833,7 +5277,7 @@
           <a:bodyPr wrap="square" lIns="0" tIns="0" rIns="0" bIns="0" rtlCol="0" anchor="ctr"/>
           <a:lstStyle/>
           <a:p>
-            <a:pPr indent="0" marL="0">
+            <a:pPr marL="0" indent="0">
               <a:buNone/>
             </a:pPr>
             <a:r>
@@ -5845,7 +5289,7 @@
                 <a:ea typeface="Calibri" pitchFamily="34" charset="-122"/>
                 <a:cs typeface="Calibri" pitchFamily="34" charset="-120"/>
               </a:rPr>
-              <a:t>KSC LC-39A has the highest success rate. All sites are strategically located near coastlines for safety.</a:t>
+              <a:t>ML models achieve up to 83.3% accuracy using launch parameters alone, proving that first-stage recovery can be modeled effectively.</a:t>
             </a:r>
             <a:endParaRPr lang="en-US" sz="1100" dirty="0"/>
           </a:p>
@@ -5853,13 +5297,13 @@
       </p:sp>
       <p:sp>
         <p:nvSpPr>
-          <p:cNvPr id="19" name="Shape 14"/>
-          <p:cNvSpPr/>
-          <p:nvPr/>
-        </p:nvSpPr>
-        <p:spPr>
-          <a:xfrm>
-            <a:off x="457200" y="3383280"/>
+          <p:cNvPr id="9" name="Shape 6"/>
+          <p:cNvSpPr/>
+          <p:nvPr/>
+        </p:nvSpPr>
+        <p:spPr>
+          <a:xfrm>
+            <a:off x="457200" y="1828800"/>
             <a:ext cx="8229600" cy="640080"/>
           </a:xfrm>
           <a:prstGeom prst="rect">
@@ -5870,7 +5314,7 @@
           </a:solidFill>
           <a:ln/>
           <a:effectLst>
-            <a:outerShdw sx="100000" sy="100000" kx="0" ky="0" algn="bl" rotWithShape="0" blurRad="50800" dist="25400" dir="8100000">
+            <a:outerShdw blurRad="50800" dist="25400" dir="8100000" algn="bl" rotWithShape="0">
               <a:srgbClr val="000000">
                 <a:alpha val="12000"/>
               </a:srgbClr>
@@ -5880,13 +5324,13 @@
       </p:sp>
       <p:sp>
         <p:nvSpPr>
-          <p:cNvPr id="20" name="Shape 15"/>
-          <p:cNvSpPr/>
-          <p:nvPr/>
-        </p:nvSpPr>
-        <p:spPr>
-          <a:xfrm>
-            <a:off x="457200" y="3383280"/>
+          <p:cNvPr id="10" name="Shape 7"/>
+          <p:cNvSpPr/>
+          <p:nvPr/>
+        </p:nvSpPr>
+        <p:spPr>
+          <a:xfrm>
+            <a:off x="457200" y="1828800"/>
             <a:ext cx="54864" cy="640080"/>
           </a:xfrm>
           <a:prstGeom prst="rect">
@@ -5900,21 +5344,21 @@
       </p:sp>
       <p:pic>
         <p:nvPicPr>
-          <p:cNvPr id="21" name="Image 3" descr="preencoded.png">    </p:cNvPr>
+          <p:cNvPr id="11" name="Image 1" descr="preencoded.png"/>
           <p:cNvPicPr>
             <a:picLocks noChangeAspect="1"/>
           </p:cNvPicPr>
           <p:nvPr/>
         </p:nvPicPr>
         <p:blipFill>
-          <a:blip r:embed="rId4"/>
+          <a:blip r:embed="rId3"/>
           <a:stretch>
             <a:fillRect/>
           </a:stretch>
         </p:blipFill>
         <p:spPr>
           <a:xfrm>
-            <a:off x="640080" y="3520440"/>
+            <a:off x="640080" y="1965960"/>
             <a:ext cx="274320" cy="274320"/>
           </a:xfrm>
           <a:prstGeom prst="rect">
@@ -5924,13 +5368,13 @@
       </p:pic>
       <p:sp>
         <p:nvSpPr>
-          <p:cNvPr id="22" name="Text 16"/>
-          <p:cNvSpPr/>
-          <p:nvPr/>
-        </p:nvSpPr>
-        <p:spPr>
-          <a:xfrm>
-            <a:off x="1051560" y="3429000"/>
+          <p:cNvPr id="12" name="Text 8"/>
+          <p:cNvSpPr/>
+          <p:nvPr/>
+        </p:nvSpPr>
+        <p:spPr>
+          <a:xfrm>
+            <a:off x="1051560" y="1874520"/>
             <a:ext cx="3200400" cy="274320"/>
           </a:xfrm>
           <a:prstGeom prst="rect">
@@ -5943,7 +5387,7 @@
           <a:bodyPr wrap="square" lIns="0" tIns="0" rIns="0" bIns="0" rtlCol="0" anchor="ctr"/>
           <a:lstStyle/>
           <a:p>
-            <a:pPr indent="0" marL="0">
+            <a:pPr marL="0" indent="0">
               <a:buNone/>
             </a:pPr>
             <a:r>
@@ -5955,7 +5399,7 @@
                 <a:ea typeface="Trebuchet MS" pitchFamily="34" charset="-122"/>
                 <a:cs typeface="Trebuchet MS" pitchFamily="34" charset="-120"/>
               </a:rPr>
-              <a:t>Payload and orbit influence outcome</a:t>
+              <a:t>Success rate is improving</a:t>
             </a:r>
             <a:endParaRPr lang="en-US" sz="1300" dirty="0"/>
           </a:p>
@@ -5963,13 +5407,13 @@
       </p:sp>
       <p:sp>
         <p:nvSpPr>
-          <p:cNvPr id="23" name="Text 17"/>
-          <p:cNvSpPr/>
-          <p:nvPr/>
-        </p:nvSpPr>
-        <p:spPr>
-          <a:xfrm>
-            <a:off x="1051560" y="3703320"/>
+          <p:cNvPr id="13" name="Text 9"/>
+          <p:cNvSpPr/>
+          <p:nvPr/>
+        </p:nvSpPr>
+        <p:spPr>
+          <a:xfrm>
+            <a:off x="1051560" y="2148840"/>
             <a:ext cx="7406640" cy="274320"/>
           </a:xfrm>
           <a:prstGeom prst="rect">
@@ -5982,7 +5426,7 @@
           <a:bodyPr wrap="square" lIns="0" tIns="0" rIns="0" bIns="0" rtlCol="0" anchor="ctr"/>
           <a:lstStyle/>
           <a:p>
-            <a:pPr indent="0" marL="0">
+            <a:pPr marL="0" indent="0">
               <a:buNone/>
             </a:pPr>
             <a:r>
@@ -5994,7 +5438,7 @@
                 <a:ea typeface="Calibri" pitchFamily="34" charset="-122"/>
                 <a:cs typeface="Calibri" pitchFamily="34" charset="-120"/>
               </a:rPr>
-              <a:t>Heavier payloads in LEO/ISS orbits still achieve high success. GTO missions have lower landing rates due to higher energy requirements.</a:t>
+              <a:t>From 0% in 2010 to 93% in 2020 — SpaceX has dramatically improved its landing technology over time.</a:t>
             </a:r>
             <a:endParaRPr lang="en-US" sz="1100" dirty="0"/>
           </a:p>
@@ -6002,13 +5446,13 @@
       </p:sp>
       <p:sp>
         <p:nvSpPr>
-          <p:cNvPr id="24" name="Shape 18"/>
-          <p:cNvSpPr/>
-          <p:nvPr/>
-        </p:nvSpPr>
-        <p:spPr>
-          <a:xfrm>
-            <a:off x="457200" y="4160520"/>
+          <p:cNvPr id="14" name="Shape 10"/>
+          <p:cNvSpPr/>
+          <p:nvPr/>
+        </p:nvSpPr>
+        <p:spPr>
+          <a:xfrm>
+            <a:off x="457200" y="2606040"/>
             <a:ext cx="8229600" cy="640080"/>
           </a:xfrm>
           <a:prstGeom prst="rect">
@@ -6019,7 +5463,7 @@
           </a:solidFill>
           <a:ln/>
           <a:effectLst>
-            <a:outerShdw sx="100000" sy="100000" kx="0" ky="0" algn="bl" rotWithShape="0" blurRad="50800" dist="25400" dir="8100000">
+            <a:outerShdw blurRad="50800" dist="25400" dir="8100000" algn="bl" rotWithShape="0">
               <a:srgbClr val="000000">
                 <a:alpha val="12000"/>
               </a:srgbClr>
@@ -6029,13 +5473,13 @@
       </p:sp>
       <p:sp>
         <p:nvSpPr>
-          <p:cNvPr id="25" name="Shape 19"/>
-          <p:cNvSpPr/>
-          <p:nvPr/>
-        </p:nvSpPr>
-        <p:spPr>
-          <a:xfrm>
-            <a:off x="457200" y="4160520"/>
+          <p:cNvPr id="15" name="Shape 11"/>
+          <p:cNvSpPr/>
+          <p:nvPr/>
+        </p:nvSpPr>
+        <p:spPr>
+          <a:xfrm>
+            <a:off x="457200" y="2606040"/>
             <a:ext cx="54864" cy="640080"/>
           </a:xfrm>
           <a:prstGeom prst="rect">
@@ -6049,21 +5493,21 @@
       </p:sp>
       <p:pic>
         <p:nvPicPr>
-          <p:cNvPr id="26" name="Image 4" descr="preencoded.png">    </p:cNvPr>
+          <p:cNvPr id="16" name="Image 2" descr="preencoded.png"/>
           <p:cNvPicPr>
             <a:picLocks noChangeAspect="1"/>
           </p:cNvPicPr>
           <p:nvPr/>
         </p:nvPicPr>
         <p:blipFill>
-          <a:blip r:embed="rId5"/>
+          <a:blip r:embed="rId3"/>
           <a:stretch>
             <a:fillRect/>
           </a:stretch>
         </p:blipFill>
         <p:spPr>
           <a:xfrm>
-            <a:off x="640080" y="4297680"/>
+            <a:off x="640080" y="2743200"/>
             <a:ext cx="274320" cy="274320"/>
           </a:xfrm>
           <a:prstGeom prst="rect">
@@ -6073,13 +5517,13 @@
       </p:pic>
       <p:sp>
         <p:nvSpPr>
-          <p:cNvPr id="27" name="Text 20"/>
-          <p:cNvSpPr/>
-          <p:nvPr/>
-        </p:nvSpPr>
-        <p:spPr>
-          <a:xfrm>
-            <a:off x="1051560" y="4206240"/>
+          <p:cNvPr id="17" name="Text 12"/>
+          <p:cNvSpPr/>
+          <p:nvPr/>
+        </p:nvSpPr>
+        <p:spPr>
+          <a:xfrm>
+            <a:off x="1051560" y="2651760"/>
             <a:ext cx="3200400" cy="274320"/>
           </a:xfrm>
           <a:prstGeom prst="rect">
@@ -6092,7 +5536,7 @@
           <a:bodyPr wrap="square" lIns="0" tIns="0" rIns="0" bIns="0" rtlCol="0" anchor="ctr"/>
           <a:lstStyle/>
           <a:p>
-            <a:pPr indent="0" marL="0">
+            <a:pPr marL="0" indent="0">
               <a:buNone/>
             </a:pPr>
             <a:r>
@@ -6104,6 +5548,304 @@
                 <a:ea typeface="Trebuchet MS" pitchFamily="34" charset="-122"/>
                 <a:cs typeface="Trebuchet MS" pitchFamily="34" charset="-120"/>
               </a:rPr>
+              <a:t>Launch site matters</a:t>
+            </a:r>
+            <a:endParaRPr lang="en-US" sz="1300" dirty="0"/>
+          </a:p>
+        </p:txBody>
+      </p:sp>
+      <p:sp>
+        <p:nvSpPr>
+          <p:cNvPr id="18" name="Text 13"/>
+          <p:cNvSpPr/>
+          <p:nvPr/>
+        </p:nvSpPr>
+        <p:spPr>
+          <a:xfrm>
+            <a:off x="1051560" y="2926080"/>
+            <a:ext cx="7406640" cy="274320"/>
+          </a:xfrm>
+          <a:prstGeom prst="rect">
+            <a:avLst/>
+          </a:prstGeom>
+          <a:noFill/>
+          <a:ln/>
+        </p:spPr>
+        <p:txBody>
+          <a:bodyPr wrap="square" lIns="0" tIns="0" rIns="0" bIns="0" rtlCol="0" anchor="ctr"/>
+          <a:lstStyle/>
+          <a:p>
+            <a:pPr marL="0" indent="0">
+              <a:buNone/>
+            </a:pPr>
+            <a:r>
+              <a:rPr lang="en-US" sz="1100" dirty="0">
+                <a:solidFill>
+                  <a:srgbClr val="0F172A"/>
+                </a:solidFill>
+                <a:latin typeface="Calibri" pitchFamily="34" charset="0"/>
+                <a:ea typeface="Calibri" pitchFamily="34" charset="-122"/>
+                <a:cs typeface="Calibri" pitchFamily="34" charset="-120"/>
+              </a:rPr>
+              <a:t>KSC LC-39A has the highest success rate. All sites are strategically located near coastlines for safety.</a:t>
+            </a:r>
+            <a:endParaRPr lang="en-US" sz="1100" dirty="0"/>
+          </a:p>
+        </p:txBody>
+      </p:sp>
+      <p:sp>
+        <p:nvSpPr>
+          <p:cNvPr id="19" name="Shape 14"/>
+          <p:cNvSpPr/>
+          <p:nvPr/>
+        </p:nvSpPr>
+        <p:spPr>
+          <a:xfrm>
+            <a:off x="457200" y="3383280"/>
+            <a:ext cx="8229600" cy="640080"/>
+          </a:xfrm>
+          <a:prstGeom prst="rect">
+            <a:avLst/>
+          </a:prstGeom>
+          <a:solidFill>
+            <a:srgbClr val="FFFFFF"/>
+          </a:solidFill>
+          <a:ln/>
+          <a:effectLst>
+            <a:outerShdw blurRad="50800" dist="25400" dir="8100000" algn="bl" rotWithShape="0">
+              <a:srgbClr val="000000">
+                <a:alpha val="12000"/>
+              </a:srgbClr>
+            </a:outerShdw>
+          </a:effectLst>
+        </p:spPr>
+      </p:sp>
+      <p:sp>
+        <p:nvSpPr>
+          <p:cNvPr id="20" name="Shape 15"/>
+          <p:cNvSpPr/>
+          <p:nvPr/>
+        </p:nvSpPr>
+        <p:spPr>
+          <a:xfrm>
+            <a:off x="457200" y="3383280"/>
+            <a:ext cx="54864" cy="640080"/>
+          </a:xfrm>
+          <a:prstGeom prst="rect">
+            <a:avLst/>
+          </a:prstGeom>
+          <a:solidFill>
+            <a:srgbClr val="0891B2"/>
+          </a:solidFill>
+          <a:ln/>
+        </p:spPr>
+      </p:sp>
+      <p:pic>
+        <p:nvPicPr>
+          <p:cNvPr id="21" name="Image 3" descr="preencoded.png"/>
+          <p:cNvPicPr>
+            <a:picLocks noChangeAspect="1"/>
+          </p:cNvPicPr>
+          <p:nvPr/>
+        </p:nvPicPr>
+        <p:blipFill>
+          <a:blip r:embed="rId3"/>
+          <a:stretch>
+            <a:fillRect/>
+          </a:stretch>
+        </p:blipFill>
+        <p:spPr>
+          <a:xfrm>
+            <a:off x="640080" y="3520440"/>
+            <a:ext cx="274320" cy="274320"/>
+          </a:xfrm>
+          <a:prstGeom prst="rect">
+            <a:avLst/>
+          </a:prstGeom>
+        </p:spPr>
+      </p:pic>
+      <p:sp>
+        <p:nvSpPr>
+          <p:cNvPr id="22" name="Text 16"/>
+          <p:cNvSpPr/>
+          <p:nvPr/>
+        </p:nvSpPr>
+        <p:spPr>
+          <a:xfrm>
+            <a:off x="1051560" y="3429000"/>
+            <a:ext cx="3200400" cy="274320"/>
+          </a:xfrm>
+          <a:prstGeom prst="rect">
+            <a:avLst/>
+          </a:prstGeom>
+          <a:noFill/>
+          <a:ln/>
+        </p:spPr>
+        <p:txBody>
+          <a:bodyPr wrap="square" lIns="0" tIns="0" rIns="0" bIns="0" rtlCol="0" anchor="ctr"/>
+          <a:lstStyle/>
+          <a:p>
+            <a:pPr marL="0" indent="0">
+              <a:buNone/>
+            </a:pPr>
+            <a:r>
+              <a:rPr lang="en-US" sz="1300" b="1" dirty="0">
+                <a:solidFill>
+                  <a:srgbClr val="0B1D3A"/>
+                </a:solidFill>
+                <a:latin typeface="Trebuchet MS" pitchFamily="34" charset="0"/>
+                <a:ea typeface="Trebuchet MS" pitchFamily="34" charset="-122"/>
+                <a:cs typeface="Trebuchet MS" pitchFamily="34" charset="-120"/>
+              </a:rPr>
+              <a:t>Payload and orbit influence outcome</a:t>
+            </a:r>
+            <a:endParaRPr lang="en-US" sz="1300" dirty="0"/>
+          </a:p>
+        </p:txBody>
+      </p:sp>
+      <p:sp>
+        <p:nvSpPr>
+          <p:cNvPr id="23" name="Text 17"/>
+          <p:cNvSpPr/>
+          <p:nvPr/>
+        </p:nvSpPr>
+        <p:spPr>
+          <a:xfrm>
+            <a:off x="1051560" y="3703320"/>
+            <a:ext cx="7406640" cy="274320"/>
+          </a:xfrm>
+          <a:prstGeom prst="rect">
+            <a:avLst/>
+          </a:prstGeom>
+          <a:noFill/>
+          <a:ln/>
+        </p:spPr>
+        <p:txBody>
+          <a:bodyPr wrap="square" lIns="0" tIns="0" rIns="0" bIns="0" rtlCol="0" anchor="ctr"/>
+          <a:lstStyle/>
+          <a:p>
+            <a:pPr marL="0" indent="0">
+              <a:buNone/>
+            </a:pPr>
+            <a:r>
+              <a:rPr lang="en-US" sz="1100" dirty="0">
+                <a:solidFill>
+                  <a:srgbClr val="0F172A"/>
+                </a:solidFill>
+                <a:latin typeface="Calibri" pitchFamily="34" charset="0"/>
+                <a:ea typeface="Calibri" pitchFamily="34" charset="-122"/>
+                <a:cs typeface="Calibri" pitchFamily="34" charset="-120"/>
+              </a:rPr>
+              <a:t>Heavier payloads in LEO/ISS orbits still achieve high success. GTO missions have lower landing rates due to higher energy requirements.</a:t>
+            </a:r>
+            <a:endParaRPr lang="en-US" sz="1100" dirty="0"/>
+          </a:p>
+        </p:txBody>
+      </p:sp>
+      <p:sp>
+        <p:nvSpPr>
+          <p:cNvPr id="24" name="Shape 18"/>
+          <p:cNvSpPr/>
+          <p:nvPr/>
+        </p:nvSpPr>
+        <p:spPr>
+          <a:xfrm>
+            <a:off x="457200" y="4160520"/>
+            <a:ext cx="8229600" cy="640080"/>
+          </a:xfrm>
+          <a:prstGeom prst="rect">
+            <a:avLst/>
+          </a:prstGeom>
+          <a:solidFill>
+            <a:srgbClr val="FFFFFF"/>
+          </a:solidFill>
+          <a:ln/>
+          <a:effectLst>
+            <a:outerShdw blurRad="50800" dist="25400" dir="8100000" algn="bl" rotWithShape="0">
+              <a:srgbClr val="000000">
+                <a:alpha val="12000"/>
+              </a:srgbClr>
+            </a:outerShdw>
+          </a:effectLst>
+        </p:spPr>
+      </p:sp>
+      <p:sp>
+        <p:nvSpPr>
+          <p:cNvPr id="25" name="Shape 19"/>
+          <p:cNvSpPr/>
+          <p:nvPr/>
+        </p:nvSpPr>
+        <p:spPr>
+          <a:xfrm>
+            <a:off x="457200" y="4160520"/>
+            <a:ext cx="54864" cy="640080"/>
+          </a:xfrm>
+          <a:prstGeom prst="rect">
+            <a:avLst/>
+          </a:prstGeom>
+          <a:solidFill>
+            <a:srgbClr val="0891B2"/>
+          </a:solidFill>
+          <a:ln/>
+        </p:spPr>
+      </p:sp>
+      <p:pic>
+        <p:nvPicPr>
+          <p:cNvPr id="26" name="Image 4" descr="preencoded.png"/>
+          <p:cNvPicPr>
+            <a:picLocks noChangeAspect="1"/>
+          </p:cNvPicPr>
+          <p:nvPr/>
+        </p:nvPicPr>
+        <p:blipFill>
+          <a:blip r:embed="rId3"/>
+          <a:stretch>
+            <a:fillRect/>
+          </a:stretch>
+        </p:blipFill>
+        <p:spPr>
+          <a:xfrm>
+            <a:off x="640080" y="4297680"/>
+            <a:ext cx="274320" cy="274320"/>
+          </a:xfrm>
+          <a:prstGeom prst="rect">
+            <a:avLst/>
+          </a:prstGeom>
+        </p:spPr>
+      </p:pic>
+      <p:sp>
+        <p:nvSpPr>
+          <p:cNvPr id="27" name="Text 20"/>
+          <p:cNvSpPr/>
+          <p:nvPr/>
+        </p:nvSpPr>
+        <p:spPr>
+          <a:xfrm>
+            <a:off x="1051560" y="4206240"/>
+            <a:ext cx="3200400" cy="274320"/>
+          </a:xfrm>
+          <a:prstGeom prst="rect">
+            <a:avLst/>
+          </a:prstGeom>
+          <a:noFill/>
+          <a:ln/>
+        </p:spPr>
+        <p:txBody>
+          <a:bodyPr wrap="square" lIns="0" tIns="0" rIns="0" bIns="0" rtlCol="0" anchor="ctr"/>
+          <a:lstStyle/>
+          <a:p>
+            <a:pPr marL="0" indent="0">
+              <a:buNone/>
+            </a:pPr>
+            <a:r>
+              <a:rPr lang="en-US" sz="1300" b="1" dirty="0">
+                <a:solidFill>
+                  <a:srgbClr val="0B1D3A"/>
+                </a:solidFill>
+                <a:latin typeface="Trebuchet MS" pitchFamily="34" charset="0"/>
+                <a:ea typeface="Trebuchet MS" pitchFamily="34" charset="-122"/>
+                <a:cs typeface="Trebuchet MS" pitchFamily="34" charset="-120"/>
+              </a:rPr>
               <a:t>Logistic Regression is recommended</a:t>
             </a:r>
             <a:endParaRPr lang="en-US" sz="1300" dirty="0"/>
@@ -6131,7 +5873,7 @@
           <a:bodyPr wrap="square" lIns="0" tIns="0" rIns="0" bIns="0" rtlCol="0" anchor="ctr"/>
           <a:lstStyle/>
           <a:p>
-            <a:pPr indent="0" marL="0">
+            <a:pPr marL="0" indent="0">
               <a:buNone/>
             </a:pPr>
             <a:r>
@@ -6165,6 +5907,7 @@
         <a:solidFill>
           <a:srgbClr val="F0F9FF"/>
         </a:solidFill>
+        <a:effectLst/>
       </p:bgPr>
     </p:bg>
     <p:spTree>
@@ -6222,7 +5965,7 @@
           <a:bodyPr wrap="square" lIns="0" tIns="0" rIns="0" bIns="0" rtlCol="0" anchor="ctr"/>
           <a:lstStyle/>
           <a:p>
-            <a:pPr indent="0" marL="0">
+            <a:pPr marL="0" indent="0">
               <a:buNone/>
             </a:pPr>
             <a:r>
@@ -6242,14 +5985,14 @@
       </p:sp>
       <p:pic>
         <p:nvPicPr>
-          <p:cNvPr id="4" name="Image 0" descr="preencoded.png">    </p:cNvPr>
+          <p:cNvPr id="4" name="Image 0" descr="preencoded.png"/>
           <p:cNvPicPr>
             <a:picLocks noChangeAspect="1"/>
           </p:cNvPicPr>
           <p:nvPr/>
         </p:nvPicPr>
         <p:blipFill>
-          <a:blip r:embed="rId1"/>
+          <a:blip r:embed="rId3"/>
           <a:stretch>
             <a:fillRect/>
           </a:stretch>
@@ -6285,7 +6028,7 @@
           <a:bodyPr wrap="square" lIns="0" tIns="0" rIns="0" bIns="0" rtlCol="0" anchor="ctr"/>
           <a:lstStyle/>
           <a:p>
-            <a:pPr indent="0" marL="0">
+            <a:pPr marL="0" indent="0">
               <a:buNone/>
             </a:pPr>
             <a:r>
@@ -6322,7 +6065,7 @@
           </a:solidFill>
           <a:ln/>
           <a:effectLst>
-            <a:outerShdw sx="100000" sy="100000" kx="0" ky="0" algn="bl" rotWithShape="0" blurRad="50800" dist="25400" dir="8100000">
+            <a:outerShdw blurRad="50800" dist="25400" dir="8100000" algn="bl" rotWithShape="0">
               <a:srgbClr val="000000">
                 <a:alpha val="12000"/>
               </a:srgbClr>
@@ -6371,7 +6114,7 @@
           <a:bodyPr wrap="square" lIns="0" tIns="0" rIns="0" bIns="0" rtlCol="0" anchor="ctr"/>
           <a:lstStyle/>
           <a:p>
-            <a:pPr indent="0" marL="0">
+            <a:pPr marL="0" indent="0">
               <a:buNone/>
             </a:pPr>
             <a:r>
@@ -6410,7 +6153,7 @@
           <a:bodyPr wrap="square" lIns="0" tIns="0" rIns="0" bIns="0" rtlCol="0" anchor="ctr"/>
           <a:lstStyle/>
           <a:p>
-            <a:pPr indent="0" marL="0">
+            <a:pPr marL="0" indent="0">
               <a:lnSpc>
                 <a:spcPct val="130000"/>
               </a:lnSpc>
@@ -6450,7 +6193,7 @@
           </a:solidFill>
           <a:ln/>
           <a:effectLst>
-            <a:outerShdw sx="100000" sy="100000" kx="0" ky="0" algn="bl" rotWithShape="0" blurRad="50800" dist="25400" dir="8100000">
+            <a:outerShdw blurRad="50800" dist="25400" dir="8100000" algn="bl" rotWithShape="0">
               <a:srgbClr val="000000">
                 <a:alpha val="12000"/>
               </a:srgbClr>
@@ -6499,7 +6242,7 @@
           <a:bodyPr wrap="square" lIns="0" tIns="0" rIns="0" bIns="0" rtlCol="0" anchor="ctr"/>
           <a:lstStyle/>
           <a:p>
-            <a:pPr indent="0" marL="0">
+            <a:pPr marL="0" indent="0">
               <a:buNone/>
             </a:pPr>
             <a:r>
@@ -6538,7 +6281,7 @@
           <a:bodyPr wrap="square" lIns="0" tIns="0" rIns="0" bIns="0" rtlCol="0" anchor="ctr"/>
           <a:lstStyle/>
           <a:p>
-            <a:pPr indent="0" marL="0">
+            <a:pPr marL="0" indent="0">
               <a:lnSpc>
                 <a:spcPct val="130000"/>
               </a:lnSpc>
@@ -6578,7 +6321,7 @@
           </a:solidFill>
           <a:ln/>
           <a:effectLst>
-            <a:outerShdw sx="100000" sy="100000" kx="0" ky="0" algn="bl" rotWithShape="0" blurRad="50800" dist="25400" dir="8100000">
+            <a:outerShdw blurRad="50800" dist="25400" dir="8100000" algn="bl" rotWithShape="0">
               <a:srgbClr val="000000">
                 <a:alpha val="12000"/>
               </a:srgbClr>
@@ -6627,7 +6370,7 @@
           <a:bodyPr wrap="square" lIns="0" tIns="0" rIns="0" bIns="0" rtlCol="0" anchor="ctr"/>
           <a:lstStyle/>
           <a:p>
-            <a:pPr indent="0" marL="0">
+            <a:pPr marL="0" indent="0">
               <a:buNone/>
             </a:pPr>
             <a:r>
@@ -6666,7 +6409,7 @@
           <a:bodyPr wrap="square" lIns="0" tIns="0" rIns="0" bIns="0" rtlCol="0" anchor="ctr"/>
           <a:lstStyle/>
           <a:p>
-            <a:pPr indent="0" marL="0">
+            <a:pPr marL="0" indent="0">
               <a:lnSpc>
                 <a:spcPct val="130000"/>
               </a:lnSpc>
@@ -6706,7 +6449,7 @@
           </a:solidFill>
           <a:ln/>
           <a:effectLst>
-            <a:outerShdw sx="100000" sy="100000" kx="0" ky="0" algn="bl" rotWithShape="0" blurRad="50800" dist="25400" dir="8100000">
+            <a:outerShdw blurRad="50800" dist="25400" dir="8100000" algn="bl" rotWithShape="0">
               <a:srgbClr val="000000">
                 <a:alpha val="12000"/>
               </a:srgbClr>
@@ -6755,7 +6498,7 @@
           <a:bodyPr wrap="square" lIns="0" tIns="0" rIns="0" bIns="0" rtlCol="0" anchor="ctr"/>
           <a:lstStyle/>
           <a:p>
-            <a:pPr indent="0" marL="0">
+            <a:pPr marL="0" indent="0">
               <a:buNone/>
             </a:pPr>
             <a:r>
@@ -6794,7 +6537,7 @@
           <a:bodyPr wrap="square" lIns="0" tIns="0" rIns="0" bIns="0" rtlCol="0" anchor="ctr"/>
           <a:lstStyle/>
           <a:p>
-            <a:pPr indent="0" marL="0">
+            <a:pPr marL="0" indent="0">
               <a:lnSpc>
                 <a:spcPct val="130000"/>
               </a:lnSpc>
@@ -6831,6 +6574,7 @@
         <a:solidFill>
           <a:srgbClr val="0B1D3A"/>
         </a:solidFill>
+        <a:effectLst/>
       </p:bgPr>
     </p:bg>
     <p:spTree>
@@ -6888,7 +6632,7 @@
           <a:bodyPr wrap="square" lIns="0" tIns="0" rIns="0" bIns="0" rtlCol="0" anchor="ctr"/>
           <a:lstStyle/>
           <a:p>
-            <a:pPr algn="ctr" indent="0" marL="0">
+            <a:pPr marL="0" indent="0" algn="ctr">
               <a:buNone/>
             </a:pPr>
             <a:r>
@@ -6928,14 +6672,14 @@
       </p:sp>
       <p:pic>
         <p:nvPicPr>
-          <p:cNvPr id="5" name="Image 0" descr="preencoded.png">    </p:cNvPr>
+          <p:cNvPr id="5" name="Image 0" descr="preencoded.png"/>
           <p:cNvPicPr>
             <a:picLocks noChangeAspect="1"/>
           </p:cNvPicPr>
           <p:nvPr/>
         </p:nvPicPr>
         <p:blipFill>
-          <a:blip r:embed="rId1"/>
+          <a:blip r:embed="rId3"/>
           <a:stretch>
             <a:fillRect/>
           </a:stretch>
@@ -6971,7 +6715,7 @@
           <a:bodyPr wrap="square" lIns="0" tIns="0" rIns="0" bIns="0" rtlCol="0" anchor="ctr"/>
           <a:lstStyle/>
           <a:p>
-            <a:pPr indent="0" marL="0">
+            <a:pPr marL="0" indent="0">
               <a:buNone/>
             </a:pPr>
             <a:r>
@@ -7010,9 +6754,7 @@
           <a:bodyPr wrap="square" lIns="0" tIns="0" rIns="0" bIns="0" rtlCol="0" anchor="ctr"/>
           <a:lstStyle/>
           <a:p>
-            <a:pPr algn="ctr" indent="0" marL="0">
-              <a:buNone/>
-            </a:pPr>
+            <a:pPr algn="ctr"/>
             <a:r>
               <a:rPr lang="en-US" sz="1400" dirty="0">
                 <a:solidFill>
@@ -7022,7 +6764,7 @@
                 <a:ea typeface="Calibri" pitchFamily="34" charset="-122"/>
                 <a:cs typeface="Calibri" pitchFamily="34" charset="-120"/>
               </a:rPr>
-              <a:t>https://github.com/YOUR-USERNAME/spacex-capstone</a:t>
+              <a:t>https://github.com/Pierre-CLT/Applied_Data_Science_Capstone_IBM</a:t>
             </a:r>
             <a:endParaRPr lang="en-US" sz="1400" dirty="0"/>
           </a:p>
@@ -7049,7 +6791,7 @@
           <a:bodyPr wrap="square" lIns="0" tIns="0" rIns="0" bIns="0" rtlCol="0" anchor="ctr"/>
           <a:lstStyle/>
           <a:p>
-            <a:pPr algn="ctr" indent="0" marL="0">
+            <a:pPr marL="0" indent="0" algn="ctr">
               <a:buNone/>
             </a:pPr>
             <a:r>
@@ -7083,6 +6825,7 @@
         <a:solidFill>
           <a:srgbClr val="F0F9FF"/>
         </a:solidFill>
+        <a:effectLst/>
       </p:bgPr>
     </p:bg>
     <p:spTree>
@@ -7140,7 +6883,7 @@
           <a:bodyPr wrap="square" lIns="0" tIns="0" rIns="0" bIns="0" rtlCol="0" anchor="ctr"/>
           <a:lstStyle/>
           <a:p>
-            <a:pPr indent="0" marL="0">
+            <a:pPr marL="0" indent="0">
               <a:buNone/>
             </a:pPr>
             <a:r>
@@ -7177,7 +6920,7 @@
           </a:solidFill>
           <a:ln/>
           <a:effectLst>
-            <a:outerShdw sx="100000" sy="100000" kx="0" ky="0" algn="bl" rotWithShape="0" blurRad="50800" dist="25400" dir="8100000">
+            <a:outerShdw blurRad="50800" dist="25400" dir="8100000" algn="bl" rotWithShape="0">
               <a:srgbClr val="000000">
                 <a:alpha val="12000"/>
               </a:srgbClr>
@@ -7226,7 +6969,7 @@
           <a:bodyPr wrap="square" lIns="0" tIns="0" rIns="0" bIns="0" rtlCol="0" anchor="ctr"/>
           <a:lstStyle/>
           <a:p>
-            <a:pPr algn="ctr" indent="0" marL="0">
+            <a:pPr marL="0" indent="0" algn="ctr">
               <a:buNone/>
             </a:pPr>
             <a:r>
@@ -7265,7 +7008,7 @@
           <a:bodyPr wrap="square" lIns="0" tIns="0" rIns="0" bIns="0" rtlCol="0" anchor="ctr"/>
           <a:lstStyle/>
           <a:p>
-            <a:pPr algn="ctr" indent="0" marL="0">
+            <a:pPr marL="0" indent="0" algn="ctr">
               <a:buNone/>
             </a:pPr>
             <a:r>
@@ -7282,7 +7025,7 @@
             <a:endParaRPr lang="en-US" sz="1100" dirty="0"/>
           </a:p>
           <a:p>
-            <a:pPr algn="ctr" indent="0" marL="0">
+            <a:pPr marL="0" indent="0" algn="ctr">
               <a:buNone/>
             </a:pPr>
             <a:r>
@@ -7319,7 +7062,7 @@
           </a:solidFill>
           <a:ln/>
           <a:effectLst>
-            <a:outerShdw sx="100000" sy="100000" kx="0" ky="0" algn="bl" rotWithShape="0" blurRad="50800" dist="25400" dir="8100000">
+            <a:outerShdw blurRad="50800" dist="25400" dir="8100000" algn="bl" rotWithShape="0">
               <a:srgbClr val="000000">
                 <a:alpha val="12000"/>
               </a:srgbClr>
@@ -7368,7 +7111,7 @@
           <a:bodyPr wrap="square" lIns="0" tIns="0" rIns="0" bIns="0" rtlCol="0" anchor="ctr"/>
           <a:lstStyle/>
           <a:p>
-            <a:pPr algn="ctr" indent="0" marL="0">
+            <a:pPr marL="0" indent="0" algn="ctr">
               <a:buNone/>
             </a:pPr>
             <a:r>
@@ -7407,7 +7150,7 @@
           <a:bodyPr wrap="square" lIns="0" tIns="0" rIns="0" bIns="0" rtlCol="0" anchor="ctr"/>
           <a:lstStyle/>
           <a:p>
-            <a:pPr algn="ctr" indent="0" marL="0">
+            <a:pPr marL="0" indent="0" algn="ctr">
               <a:buNone/>
             </a:pPr>
             <a:r>
@@ -7424,7 +7167,7 @@
             <a:endParaRPr lang="en-US" sz="1100" dirty="0"/>
           </a:p>
           <a:p>
-            <a:pPr algn="ctr" indent="0" marL="0">
+            <a:pPr marL="0" indent="0" algn="ctr">
               <a:buNone/>
             </a:pPr>
             <a:r>
@@ -7461,7 +7204,7 @@
           </a:solidFill>
           <a:ln/>
           <a:effectLst>
-            <a:outerShdw sx="100000" sy="100000" kx="0" ky="0" algn="bl" rotWithShape="0" blurRad="50800" dist="25400" dir="8100000">
+            <a:outerShdw blurRad="50800" dist="25400" dir="8100000" algn="bl" rotWithShape="0">
               <a:srgbClr val="000000">
                 <a:alpha val="12000"/>
               </a:srgbClr>
@@ -7510,7 +7253,7 @@
           <a:bodyPr wrap="square" lIns="0" tIns="0" rIns="0" bIns="0" rtlCol="0" anchor="ctr"/>
           <a:lstStyle/>
           <a:p>
-            <a:pPr algn="ctr" indent="0" marL="0">
+            <a:pPr marL="0" indent="0" algn="ctr">
               <a:buNone/>
             </a:pPr>
             <a:r>
@@ -7549,7 +7292,7 @@
           <a:bodyPr wrap="square" lIns="0" tIns="0" rIns="0" bIns="0" rtlCol="0" anchor="ctr"/>
           <a:lstStyle/>
           <a:p>
-            <a:pPr algn="ctr" indent="0" marL="0">
+            <a:pPr marL="0" indent="0" algn="ctr">
               <a:buNone/>
             </a:pPr>
             <a:r>
@@ -7566,7 +7309,7 @@
             <a:endParaRPr lang="en-US" sz="1100" dirty="0"/>
           </a:p>
           <a:p>
-            <a:pPr algn="ctr" indent="0" marL="0">
+            <a:pPr marL="0" indent="0" algn="ctr">
               <a:buNone/>
             </a:pPr>
             <a:r>
@@ -7603,7 +7346,7 @@
           </a:solidFill>
           <a:ln/>
           <a:effectLst>
-            <a:outerShdw sx="100000" sy="100000" kx="0" ky="0" algn="bl" rotWithShape="0" blurRad="50800" dist="25400" dir="8100000">
+            <a:outerShdw blurRad="50800" dist="25400" dir="8100000" algn="bl" rotWithShape="0">
               <a:srgbClr val="000000">
                 <a:alpha val="12000"/>
               </a:srgbClr>
@@ -7652,7 +7395,7 @@
           <a:bodyPr wrap="square" lIns="0" tIns="0" rIns="0" bIns="0" rtlCol="0" anchor="ctr"/>
           <a:lstStyle/>
           <a:p>
-            <a:pPr algn="ctr" indent="0" marL="0">
+            <a:pPr marL="0" indent="0" algn="ctr">
               <a:buNone/>
             </a:pPr>
             <a:r>
@@ -7691,7 +7434,7 @@
           <a:bodyPr wrap="square" lIns="0" tIns="0" rIns="0" bIns="0" rtlCol="0" anchor="ctr"/>
           <a:lstStyle/>
           <a:p>
-            <a:pPr algn="ctr" indent="0" marL="0">
+            <a:pPr marL="0" indent="0" algn="ctr">
               <a:buNone/>
             </a:pPr>
             <a:r>
@@ -7708,7 +7451,7 @@
             <a:endParaRPr lang="en-US" sz="1100" dirty="0"/>
           </a:p>
           <a:p>
-            <a:pPr algn="ctr" indent="0" marL="0">
+            <a:pPr marL="0" indent="0" algn="ctr">
               <a:buNone/>
             </a:pPr>
             <a:r>
@@ -7745,7 +7488,7 @@
           </a:solidFill>
           <a:ln/>
           <a:effectLst>
-            <a:outerShdw sx="100000" sy="100000" kx="0" ky="0" algn="bl" rotWithShape="0" blurRad="50800" dist="25400" dir="8100000">
+            <a:outerShdw blurRad="50800" dist="25400" dir="8100000" algn="bl" rotWithShape="0">
               <a:srgbClr val="000000">
                 <a:alpha val="12000"/>
               </a:srgbClr>
@@ -7774,7 +7517,7 @@
           <a:bodyPr wrap="square" rtlCol="0" anchor="t"/>
           <a:lstStyle/>
           <a:p>
-            <a:pPr indent="0" marL="0">
+            <a:pPr marL="0" indent="0">
               <a:lnSpc>
                 <a:spcPct val="130000"/>
               </a:lnSpc>
@@ -7791,67 +7534,49 @@
               </a:rPr>
               <a:t>Project Goal: </a:t>
             </a:r>
-            <a:pPr indent="0" marL="0">
+            <a:r>
+              <a:rPr lang="en-US" sz="1300" dirty="0">
+                <a:solidFill>
+                  <a:srgbClr val="0F172A"/>
+                </a:solidFill>
+                <a:latin typeface="Calibri" pitchFamily="34" charset="0"/>
+                <a:ea typeface="Calibri" pitchFamily="34" charset="-122"/>
+                <a:cs typeface="Calibri" pitchFamily="34" charset="-120"/>
+              </a:rPr>
+              <a:t>Predict whether the SpaceX Falcon 9 first stage will land successfully, enabling cost estimation for launches.</a:t>
+            </a:r>
+            <a:r>
+              <a:rPr lang="en-US" sz="600" dirty="0">
+                <a:solidFill>
+                  <a:srgbClr val="000000"/>
+                </a:solidFill>
+                <a:latin typeface="Calibri" pitchFamily="34" charset="0"/>
+                <a:ea typeface="Calibri" pitchFamily="34" charset="-122"/>
+                <a:cs typeface="Calibri" pitchFamily="34" charset="-120"/>
+              </a:rPr>
+              <a:t>
+</a:t>
+            </a:r>
+            <a:endParaRPr lang="en-US" sz="1300" dirty="0"/>
+          </a:p>
+          <a:p>
+            <a:pPr marL="0" indent="0">
               <a:lnSpc>
                 <a:spcPct val="130000"/>
               </a:lnSpc>
               <a:buNone/>
             </a:pPr>
             <a:r>
-              <a:rPr lang="en-US" sz="1300" dirty="0">
-                <a:solidFill>
-                  <a:srgbClr val="0F172A"/>
+              <a:rPr lang="en-US" sz="1300" b="1" dirty="0">
+                <a:solidFill>
+                  <a:srgbClr val="0B1D3A"/>
                 </a:solidFill>
                 <a:latin typeface="Calibri" pitchFamily="34" charset="0"/>
                 <a:ea typeface="Calibri" pitchFamily="34" charset="-122"/>
                 <a:cs typeface="Calibri" pitchFamily="34" charset="-120"/>
               </a:rPr>
-              <a:t>Predict whether the SpaceX Falcon 9 first stage will land successfully, enabling cost estimation for launches.</a:t>
-            </a:r>
-            <a:pPr indent="0" marL="0">
-              <a:lnSpc>
-                <a:spcPct val="130000"/>
-              </a:lnSpc>
-              <a:buNone/>
-            </a:pPr>
-            <a:r>
-              <a:rPr lang="en-US" sz="600" dirty="0">
-                <a:solidFill>
-                  <a:srgbClr val="000000"/>
-                </a:solidFill>
-                <a:latin typeface="Calibri" pitchFamily="34" charset="0"/>
-                <a:ea typeface="Calibri" pitchFamily="34" charset="-122"/>
-                <a:cs typeface="Calibri" pitchFamily="34" charset="-120"/>
-              </a:rPr>
-              <a:t>
-</a:t>
-            </a:r>
-            <a:endParaRPr lang="en-US" sz="1300" dirty="0"/>
-          </a:p>
-          <a:p>
-            <a:pPr indent="0" marL="0">
-              <a:lnSpc>
-                <a:spcPct val="130000"/>
-              </a:lnSpc>
-              <a:buNone/>
-            </a:pPr>
-            <a:r>
-              <a:rPr lang="en-US" sz="1300" b="1" dirty="0">
-                <a:solidFill>
-                  <a:srgbClr val="0B1D3A"/>
-                </a:solidFill>
-                <a:latin typeface="Calibri" pitchFamily="34" charset="0"/>
-                <a:ea typeface="Calibri" pitchFamily="34" charset="-122"/>
-                <a:cs typeface="Calibri" pitchFamily="34" charset="-120"/>
-              </a:rPr>
               <a:t>Key Finding: </a:t>
             </a:r>
-            <a:pPr indent="0" marL="0">
-              <a:lnSpc>
-                <a:spcPct val="130000"/>
-              </a:lnSpc>
-              <a:buNone/>
-            </a:pPr>
             <a:r>
               <a:rPr lang="en-US" sz="1300" dirty="0">
                 <a:solidFill>
@@ -7883,6 +7608,7 @@
         <a:solidFill>
           <a:srgbClr val="F0F9FF"/>
         </a:solidFill>
+        <a:effectLst/>
       </p:bgPr>
     </p:bg>
     <p:spTree>
@@ -7940,7 +7666,7 @@
           <a:bodyPr wrap="square" lIns="0" tIns="0" rIns="0" bIns="0" rtlCol="0" anchor="ctr"/>
           <a:lstStyle/>
           <a:p>
-            <a:pPr indent="0" marL="0">
+            <a:pPr marL="0" indent="0">
               <a:buNone/>
             </a:pPr>
             <a:r>
@@ -7960,14 +7686,14 @@
       </p:sp>
       <p:pic>
         <p:nvPicPr>
-          <p:cNvPr id="4" name="Image 0" descr="preencoded.png">    </p:cNvPr>
+          <p:cNvPr id="4" name="Image 0" descr="preencoded.png"/>
           <p:cNvPicPr>
             <a:picLocks noChangeAspect="1"/>
           </p:cNvPicPr>
           <p:nvPr/>
         </p:nvPicPr>
         <p:blipFill>
-          <a:blip r:embed="rId1"/>
+          <a:blip r:embed="rId3"/>
           <a:stretch>
             <a:fillRect/>
           </a:stretch>
@@ -8003,7 +7729,7 @@
           <a:bodyPr wrap="square" lIns="0" tIns="0" rIns="0" bIns="0" rtlCol="0" anchor="ctr"/>
           <a:lstStyle/>
           <a:p>
-            <a:pPr indent="0" marL="0">
+            <a:pPr marL="0" indent="0">
               <a:buNone/>
             </a:pPr>
             <a:r>
@@ -8042,7 +7768,7 @@
           <a:bodyPr wrap="square" rtlCol="0" anchor="ctr"/>
           <a:lstStyle/>
           <a:p>
-            <a:pPr indent="0" marL="0">
+            <a:pPr marL="0" indent="0">
               <a:lnSpc>
                 <a:spcPct val="130000"/>
               </a:lnSpc>
@@ -8082,7 +7808,7 @@
           </a:solidFill>
           <a:ln/>
           <a:effectLst>
-            <a:outerShdw sx="100000" sy="100000" kx="0" ky="0" algn="bl" rotWithShape="0" blurRad="50800" dist="25400" dir="8100000">
+            <a:outerShdw blurRad="50800" dist="25400" dir="8100000" algn="bl" rotWithShape="0">
               <a:srgbClr val="000000">
                 <a:alpha val="12000"/>
               </a:srgbClr>
@@ -8131,7 +7857,7 @@
           <a:bodyPr wrap="square" lIns="0" tIns="0" rIns="0" bIns="0" rtlCol="0" anchor="ctr"/>
           <a:lstStyle/>
           <a:p>
-            <a:pPr indent="0" marL="0">
+            <a:pPr marL="0" indent="0">
               <a:buNone/>
             </a:pPr>
             <a:r>
@@ -8170,7 +7896,7 @@
           <a:bodyPr wrap="square" rtlCol="0" anchor="ctr"/>
           <a:lstStyle/>
           <a:p>
-            <a:pPr indent="0" marL="0">
+            <a:pPr marL="0" indent="0">
               <a:lnSpc>
                 <a:spcPct val="130000"/>
               </a:lnSpc>
@@ -8190,7 +7916,7 @@
             <a:endParaRPr lang="en-US" sz="1200" dirty="0"/>
           </a:p>
           <a:p>
-            <a:pPr indent="0" marL="0">
+            <a:pPr marL="0" indent="0">
               <a:lnSpc>
                 <a:spcPct val="130000"/>
               </a:lnSpc>
@@ -8199,7 +7925,7 @@
             <a:endParaRPr lang="en-US" sz="1200" dirty="0"/>
           </a:p>
           <a:p>
-            <a:pPr indent="0" marL="0">
+            <a:pPr marL="0" indent="0">
               <a:lnSpc>
                 <a:spcPct val="130000"/>
               </a:lnSpc>
@@ -8239,7 +7965,7 @@
           </a:solidFill>
           <a:ln/>
           <a:effectLst>
-            <a:outerShdw sx="100000" sy="100000" kx="0" ky="0" algn="bl" rotWithShape="0" blurRad="50800" dist="25400" dir="8100000">
+            <a:outerShdw blurRad="50800" dist="25400" dir="8100000" algn="bl" rotWithShape="0">
               <a:srgbClr val="000000">
                 <a:alpha val="12000"/>
               </a:srgbClr>
@@ -8288,7 +8014,7 @@
           <a:bodyPr wrap="square" lIns="0" tIns="0" rIns="0" bIns="0" rtlCol="0" anchor="ctr"/>
           <a:lstStyle/>
           <a:p>
-            <a:pPr indent="0" marL="0">
+            <a:pPr marL="0" indent="0">
               <a:buNone/>
             </a:pPr>
             <a:r>
@@ -8327,7 +8053,7 @@
           <a:bodyPr wrap="square" rtlCol="0" anchor="ctr"/>
           <a:lstStyle/>
           <a:p>
-            <a:pPr indent="0" marL="0">
+            <a:pPr marL="0" indent="0">
               <a:lnSpc>
                 <a:spcPct val="140000"/>
               </a:lnSpc>
@@ -8347,7 +8073,7 @@
             <a:endParaRPr lang="en-US" sz="1200" dirty="0"/>
           </a:p>
           <a:p>
-            <a:pPr indent="0" marL="0">
+            <a:pPr marL="0" indent="0">
               <a:lnSpc>
                 <a:spcPct val="140000"/>
               </a:lnSpc>
@@ -8367,7 +8093,7 @@
             <a:endParaRPr lang="en-US" sz="1200" dirty="0"/>
           </a:p>
           <a:p>
-            <a:pPr indent="0" marL="0">
+            <a:pPr marL="0" indent="0">
               <a:lnSpc>
                 <a:spcPct val="140000"/>
               </a:lnSpc>
@@ -8387,7 +8113,7 @@
             <a:endParaRPr lang="en-US" sz="1200" dirty="0"/>
           </a:p>
           <a:p>
-            <a:pPr indent="0" marL="0">
+            <a:pPr marL="0" indent="0">
               <a:lnSpc>
                 <a:spcPct val="140000"/>
               </a:lnSpc>
@@ -8424,6 +8150,7 @@
         <a:solidFill>
           <a:srgbClr val="F0F9FF"/>
         </a:solidFill>
+        <a:effectLst/>
       </p:bgPr>
     </p:bg>
     <p:spTree>
@@ -8481,7 +8208,7 @@
           <a:bodyPr wrap="square" lIns="0" tIns="0" rIns="0" bIns="0" rtlCol="0" anchor="ctr"/>
           <a:lstStyle/>
           <a:p>
-            <a:pPr indent="0" marL="0">
+            <a:pPr marL="0" indent="0">
               <a:buNone/>
             </a:pPr>
             <a:r>
@@ -8518,7 +8245,7 @@
           </a:solidFill>
           <a:ln/>
           <a:effectLst>
-            <a:outerShdw sx="100000" sy="100000" kx="0" ky="0" algn="bl" rotWithShape="0" blurRad="50800" dist="25400" dir="8100000">
+            <a:outerShdw blurRad="50800" dist="25400" dir="8100000" algn="bl" rotWithShape="0">
               <a:srgbClr val="000000">
                 <a:alpha val="12000"/>
               </a:srgbClr>
@@ -8528,14 +8255,14 @@
       </p:sp>
       <p:pic>
         <p:nvPicPr>
-          <p:cNvPr id="5" name="Image 0" descr="preencoded.png">    </p:cNvPr>
+          <p:cNvPr id="5" name="Image 0" descr="preencoded.png"/>
           <p:cNvPicPr>
             <a:picLocks noChangeAspect="1"/>
           </p:cNvPicPr>
           <p:nvPr/>
         </p:nvPicPr>
         <p:blipFill>
-          <a:blip r:embed="rId1"/>
+          <a:blip r:embed="rId3"/>
           <a:stretch>
             <a:fillRect/>
           </a:stretch>
@@ -8571,7 +8298,7 @@
           <a:bodyPr wrap="square" lIns="0" tIns="0" rIns="0" bIns="0" rtlCol="0" anchor="ctr"/>
           <a:lstStyle/>
           <a:p>
-            <a:pPr indent="0" marL="0">
+            <a:pPr marL="0" indent="0">
               <a:buNone/>
             </a:pPr>
             <a:r>
@@ -8610,7 +8337,7 @@
           <a:bodyPr wrap="square" rtlCol="0" anchor="ctr"/>
           <a:lstStyle/>
           <a:p>
-            <a:pPr indent="0" marL="0">
+            <a:pPr marL="0" indent="0">
               <a:lnSpc>
                 <a:spcPct val="120000"/>
               </a:lnSpc>
@@ -8630,7 +8357,7 @@
             <a:endParaRPr lang="en-US" sz="1200" dirty="0"/>
           </a:p>
           <a:p>
-            <a:pPr indent="0" marL="0">
+            <a:pPr marL="0" indent="0">
               <a:lnSpc>
                 <a:spcPct val="120000"/>
               </a:lnSpc>
@@ -8639,7 +8366,7 @@
             <a:endParaRPr lang="en-US" sz="1200" dirty="0"/>
           </a:p>
           <a:p>
-            <a:pPr indent="0" marL="0">
+            <a:pPr marL="0" indent="0">
               <a:lnSpc>
                 <a:spcPct val="120000"/>
               </a:lnSpc>
@@ -8659,7 +8386,7 @@
             <a:endParaRPr lang="en-US" sz="1200" dirty="0"/>
           </a:p>
           <a:p>
-            <a:pPr indent="0" marL="0">
+            <a:pPr marL="0" indent="0">
               <a:lnSpc>
                 <a:spcPct val="120000"/>
               </a:lnSpc>
@@ -8668,7 +8395,7 @@
             <a:endParaRPr lang="en-US" sz="1200" dirty="0"/>
           </a:p>
           <a:p>
-            <a:pPr indent="0" marL="0">
+            <a:pPr marL="0" indent="0">
               <a:lnSpc>
                 <a:spcPct val="120000"/>
               </a:lnSpc>
@@ -8688,7 +8415,7 @@
             <a:endParaRPr lang="en-US" sz="1200" dirty="0"/>
           </a:p>
           <a:p>
-            <a:pPr indent="0" marL="0">
+            <a:pPr marL="0" indent="0">
               <a:lnSpc>
                 <a:spcPct val="120000"/>
               </a:lnSpc>
@@ -8697,7 +8424,7 @@
             <a:endParaRPr lang="en-US" sz="1200" dirty="0"/>
           </a:p>
           <a:p>
-            <a:pPr indent="0" marL="0">
+            <a:pPr marL="0" indent="0">
               <a:lnSpc>
                 <a:spcPct val="120000"/>
               </a:lnSpc>
@@ -8717,7 +8444,7 @@
             <a:endParaRPr lang="en-US" sz="1200" dirty="0"/>
           </a:p>
           <a:p>
-            <a:pPr indent="0" marL="0">
+            <a:pPr marL="0" indent="0">
               <a:lnSpc>
                 <a:spcPct val="120000"/>
               </a:lnSpc>
@@ -8726,7 +8453,7 @@
             <a:endParaRPr lang="en-US" sz="1200" dirty="0"/>
           </a:p>
           <a:p>
-            <a:pPr indent="0" marL="0">
+            <a:pPr marL="0" indent="0">
               <a:lnSpc>
                 <a:spcPct val="120000"/>
               </a:lnSpc>
@@ -8766,7 +8493,7 @@
           </a:solidFill>
           <a:ln/>
           <a:effectLst>
-            <a:outerShdw sx="100000" sy="100000" kx="0" ky="0" algn="bl" rotWithShape="0" blurRad="50800" dist="25400" dir="8100000">
+            <a:outerShdw blurRad="50800" dist="25400" dir="8100000" algn="bl" rotWithShape="0">
               <a:srgbClr val="000000">
                 <a:alpha val="12000"/>
               </a:srgbClr>
@@ -8776,14 +8503,14 @@
       </p:sp>
       <p:pic>
         <p:nvPicPr>
-          <p:cNvPr id="9" name="Image 1" descr="preencoded.png">    </p:cNvPr>
+          <p:cNvPr id="9" name="Image 1" descr="preencoded.png"/>
           <p:cNvPicPr>
             <a:picLocks noChangeAspect="1"/>
           </p:cNvPicPr>
           <p:nvPr/>
         </p:nvPicPr>
         <p:blipFill>
-          <a:blip r:embed="rId2"/>
+          <a:blip r:embed="rId4"/>
           <a:stretch>
             <a:fillRect/>
           </a:stretch>
@@ -8819,7 +8546,7 @@
           <a:bodyPr wrap="square" lIns="0" tIns="0" rIns="0" bIns="0" rtlCol="0" anchor="ctr"/>
           <a:lstStyle/>
           <a:p>
-            <a:pPr indent="0" marL="0">
+            <a:pPr marL="0" indent="0">
               <a:buNone/>
             </a:pPr>
             <a:r>
@@ -8858,7 +8585,7 @@
           <a:bodyPr wrap="square" rtlCol="0" anchor="ctr"/>
           <a:lstStyle/>
           <a:p>
-            <a:pPr indent="0" marL="0">
+            <a:pPr marL="0" indent="0">
               <a:lnSpc>
                 <a:spcPct val="120000"/>
               </a:lnSpc>
@@ -8878,7 +8605,7 @@
             <a:endParaRPr lang="en-US" sz="1200" dirty="0"/>
           </a:p>
           <a:p>
-            <a:pPr indent="0" marL="0">
+            <a:pPr marL="0" indent="0">
               <a:lnSpc>
                 <a:spcPct val="120000"/>
               </a:lnSpc>
@@ -8887,7 +8614,7 @@
             <a:endParaRPr lang="en-US" sz="1200" dirty="0"/>
           </a:p>
           <a:p>
-            <a:pPr indent="0" marL="0">
+            <a:pPr marL="0" indent="0">
               <a:lnSpc>
                 <a:spcPct val="120000"/>
               </a:lnSpc>
@@ -8907,7 +8634,7 @@
             <a:endParaRPr lang="en-US" sz="1200" dirty="0"/>
           </a:p>
           <a:p>
-            <a:pPr indent="0" marL="0">
+            <a:pPr marL="0" indent="0">
               <a:lnSpc>
                 <a:spcPct val="120000"/>
               </a:lnSpc>
@@ -8916,7 +8643,7 @@
             <a:endParaRPr lang="en-US" sz="1200" dirty="0"/>
           </a:p>
           <a:p>
-            <a:pPr indent="0" marL="0">
+            <a:pPr marL="0" indent="0">
               <a:lnSpc>
                 <a:spcPct val="120000"/>
               </a:lnSpc>
@@ -8936,7 +8663,7 @@
             <a:endParaRPr lang="en-US" sz="1200" dirty="0"/>
           </a:p>
           <a:p>
-            <a:pPr indent="0" marL="0">
+            <a:pPr marL="0" indent="0">
               <a:lnSpc>
                 <a:spcPct val="120000"/>
               </a:lnSpc>
@@ -8945,7 +8672,7 @@
             <a:endParaRPr lang="en-US" sz="1200" dirty="0"/>
           </a:p>
           <a:p>
-            <a:pPr indent="0" marL="0">
+            <a:pPr marL="0" indent="0">
               <a:lnSpc>
                 <a:spcPct val="120000"/>
               </a:lnSpc>
@@ -8965,7 +8692,7 @@
             <a:endParaRPr lang="en-US" sz="1200" dirty="0"/>
           </a:p>
           <a:p>
-            <a:pPr indent="0" marL="0">
+            <a:pPr marL="0" indent="0">
               <a:lnSpc>
                 <a:spcPct val="120000"/>
               </a:lnSpc>
@@ -8974,7 +8701,7 @@
             <a:endParaRPr lang="en-US" sz="1200" dirty="0"/>
           </a:p>
           <a:p>
-            <a:pPr indent="0" marL="0">
+            <a:pPr marL="0" indent="0">
               <a:lnSpc>
                 <a:spcPct val="120000"/>
               </a:lnSpc>
@@ -9011,6 +8738,7 @@
         <a:solidFill>
           <a:srgbClr val="F0F9FF"/>
         </a:solidFill>
+        <a:effectLst/>
       </p:bgPr>
     </p:bg>
     <p:spTree>
@@ -9068,7 +8796,7 @@
           <a:bodyPr wrap="square" lIns="0" tIns="0" rIns="0" bIns="0" rtlCol="0" anchor="ctr"/>
           <a:lstStyle/>
           <a:p>
-            <a:pPr indent="0" marL="0">
+            <a:pPr marL="0" indent="0">
               <a:buNone/>
             </a:pPr>
             <a:r>
@@ -9105,7 +8833,7 @@
           </a:solidFill>
           <a:ln/>
           <a:effectLst>
-            <a:outerShdw sx="100000" sy="100000" kx="0" ky="0" algn="bl" rotWithShape="0" blurRad="50800" dist="25400" dir="8100000">
+            <a:outerShdw blurRad="50800" dist="25400" dir="8100000" algn="bl" rotWithShape="0">
               <a:srgbClr val="000000">
                 <a:alpha val="12000"/>
               </a:srgbClr>
@@ -9154,7 +8882,7 @@
           <a:bodyPr wrap="square" lIns="0" tIns="0" rIns="0" bIns="0" rtlCol="0" anchor="ctr"/>
           <a:lstStyle/>
           <a:p>
-            <a:pPr indent="0" marL="0">
+            <a:pPr marL="0" indent="0">
               <a:buNone/>
             </a:pPr>
             <a:r>
@@ -9193,7 +8921,7 @@
           <a:bodyPr wrap="square" lIns="0" tIns="0" rIns="0" bIns="0" rtlCol="0" anchor="ctr"/>
           <a:lstStyle/>
           <a:p>
-            <a:pPr indent="0" marL="0">
+            <a:pPr marL="0" indent="0">
               <a:lnSpc>
                 <a:spcPct val="130000"/>
               </a:lnSpc>
@@ -9213,7 +8941,7 @@
             <a:endParaRPr lang="en-US" sz="1100" dirty="0"/>
           </a:p>
           <a:p>
-            <a:pPr indent="0" marL="0">
+            <a:pPr marL="0" indent="0">
               <a:lnSpc>
                 <a:spcPct val="130000"/>
               </a:lnSpc>
@@ -9253,7 +8981,7 @@
           </a:solidFill>
           <a:ln/>
           <a:effectLst>
-            <a:outerShdw sx="100000" sy="100000" kx="0" ky="0" algn="bl" rotWithShape="0" blurRad="50800" dist="25400" dir="8100000">
+            <a:outerShdw blurRad="50800" dist="25400" dir="8100000" algn="bl" rotWithShape="0">
               <a:srgbClr val="000000">
                 <a:alpha val="12000"/>
               </a:srgbClr>
@@ -9302,7 +9030,7 @@
           <a:bodyPr wrap="square" lIns="0" tIns="0" rIns="0" bIns="0" rtlCol="0" anchor="ctr"/>
           <a:lstStyle/>
           <a:p>
-            <a:pPr indent="0" marL="0">
+            <a:pPr marL="0" indent="0">
               <a:buNone/>
             </a:pPr>
             <a:r>
@@ -9341,7 +9069,7 @@
           <a:bodyPr wrap="square" lIns="0" tIns="0" rIns="0" bIns="0" rtlCol="0" anchor="ctr"/>
           <a:lstStyle/>
           <a:p>
-            <a:pPr indent="0" marL="0">
+            <a:pPr marL="0" indent="0">
               <a:lnSpc>
                 <a:spcPct val="130000"/>
               </a:lnSpc>
@@ -9361,7 +9089,7 @@
             <a:endParaRPr lang="en-US" sz="1100" dirty="0"/>
           </a:p>
           <a:p>
-            <a:pPr indent="0" marL="0">
+            <a:pPr marL="0" indent="0">
               <a:lnSpc>
                 <a:spcPct val="130000"/>
               </a:lnSpc>
@@ -9401,7 +9129,7 @@
           </a:solidFill>
           <a:ln/>
           <a:effectLst>
-            <a:outerShdw sx="100000" sy="100000" kx="0" ky="0" algn="bl" rotWithShape="0" blurRad="50800" dist="25400" dir="8100000">
+            <a:outerShdw blurRad="50800" dist="25400" dir="8100000" algn="bl" rotWithShape="0">
               <a:srgbClr val="000000">
                 <a:alpha val="12000"/>
               </a:srgbClr>
@@ -9450,7 +9178,7 @@
           <a:bodyPr wrap="square" lIns="0" tIns="0" rIns="0" bIns="0" rtlCol="0" anchor="ctr"/>
           <a:lstStyle/>
           <a:p>
-            <a:pPr indent="0" marL="0">
+            <a:pPr marL="0" indent="0">
               <a:buNone/>
             </a:pPr>
             <a:r>
@@ -9489,7 +9217,7 @@
           <a:bodyPr wrap="square" lIns="0" tIns="0" rIns="0" bIns="0" rtlCol="0" anchor="ctr"/>
           <a:lstStyle/>
           <a:p>
-            <a:pPr indent="0" marL="0">
+            <a:pPr marL="0" indent="0">
               <a:lnSpc>
                 <a:spcPct val="130000"/>
               </a:lnSpc>
@@ -9509,7 +9237,7 @@
             <a:endParaRPr lang="en-US" sz="1100" dirty="0"/>
           </a:p>
           <a:p>
-            <a:pPr indent="0" marL="0">
+            <a:pPr marL="0" indent="0">
               <a:lnSpc>
                 <a:spcPct val="130000"/>
               </a:lnSpc>
@@ -9549,7 +9277,7 @@
           </a:solidFill>
           <a:ln/>
           <a:effectLst>
-            <a:outerShdw sx="100000" sy="100000" kx="0" ky="0" algn="bl" rotWithShape="0" blurRad="50800" dist="25400" dir="8100000">
+            <a:outerShdw blurRad="50800" dist="25400" dir="8100000" algn="bl" rotWithShape="0">
               <a:srgbClr val="000000">
                 <a:alpha val="12000"/>
               </a:srgbClr>
@@ -9598,7 +9326,7 @@
           <a:bodyPr wrap="square" lIns="0" tIns="0" rIns="0" bIns="0" rtlCol="0" anchor="ctr"/>
           <a:lstStyle/>
           <a:p>
-            <a:pPr indent="0" marL="0">
+            <a:pPr marL="0" indent="0">
               <a:buNone/>
             </a:pPr>
             <a:r>
@@ -9637,7 +9365,7 @@
           <a:bodyPr wrap="square" lIns="0" tIns="0" rIns="0" bIns="0" rtlCol="0" anchor="ctr"/>
           <a:lstStyle/>
           <a:p>
-            <a:pPr indent="0" marL="0">
+            <a:pPr marL="0" indent="0">
               <a:lnSpc>
                 <a:spcPct val="130000"/>
               </a:lnSpc>
@@ -9657,7 +9385,7 @@
             <a:endParaRPr lang="en-US" sz="1100" dirty="0"/>
           </a:p>
           <a:p>
-            <a:pPr indent="0" marL="0">
+            <a:pPr marL="0" indent="0">
               <a:lnSpc>
                 <a:spcPct val="130000"/>
               </a:lnSpc>
@@ -9697,7 +9425,7 @@
           </a:solidFill>
           <a:ln/>
           <a:effectLst>
-            <a:outerShdw sx="100000" sy="100000" kx="0" ky="0" algn="bl" rotWithShape="0" blurRad="50800" dist="25400" dir="8100000">
+            <a:outerShdw blurRad="50800" dist="25400" dir="8100000" algn="bl" rotWithShape="0">
               <a:srgbClr val="000000">
                 <a:alpha val="12000"/>
               </a:srgbClr>
@@ -9726,7 +9454,7 @@
           <a:bodyPr wrap="square" lIns="0" tIns="0" rIns="0" bIns="0" rtlCol="0" anchor="ctr"/>
           <a:lstStyle/>
           <a:p>
-            <a:pPr indent="0" marL="0">
+            <a:pPr marL="0" indent="0">
               <a:buNone/>
             </a:pPr>
             <a:r>
@@ -9746,7 +9474,7 @@
       </p:sp>
       <p:graphicFrame>
         <p:nvGraphicFramePr>
-          <p:cNvPr id="6" name="Table 0"/>
+          <p:cNvPr id="22" name="Table 0"/>
           <p:cNvGraphicFramePr>
             <a:graphicFrameLocks noGrp="1"/>
           </p:cNvGraphicFramePr>
@@ -9767,8 +9495,20 @@
             <a:tbl>
               <a:tblPr/>
               <a:tblGrid>
-                <a:gridCol w="3200400"/>
-                <a:gridCol w="4480560"/>
+                <a:gridCol w="3200400">
+                  <a:extLst>
+                    <a:ext uri="{9D8B030D-6E8A-4147-A177-3AD203B41FA5}">
+                      <a16:colId xmlns:a16="http://schemas.microsoft.com/office/drawing/2014/main" val="20000"/>
+                    </a:ext>
+                  </a:extLst>
+                </a:gridCol>
+                <a:gridCol w="4480560">
+                  <a:extLst>
+                    <a:ext uri="{9D8B030D-6E8A-4147-A177-3AD203B41FA5}">
+                      <a16:colId xmlns:a16="http://schemas.microsoft.com/office/drawing/2014/main" val="20001"/>
+                    </a:ext>
+                  </a:extLst>
+                </a:gridCol>
               </a:tblGrid>
               <a:tr h="201168">
                 <a:tc>
@@ -9776,7 +9516,7 @@
                     <a:bodyPr/>
                     <a:lstStyle/>
                     <a:p>
-                      <a:pPr indent="0" marL="0">
+                      <a:pPr marL="0" indent="0">
                         <a:buNone/>
                       </a:pPr>
                       <a:r>
@@ -9797,7 +9537,7 @@
                       </a:endParaRPr>
                     </a:p>
                   </a:txBody>
-                  <a:tcPr marL="91440" marR="91440" marT="45720" marB="45720">
+                  <a:tcPr>
                     <a:lnL w="6350" cap="flat" cmpd="sng" algn="ctr">
                       <a:solidFill>
                         <a:srgbClr val="E2E8F0"/>
@@ -9841,7 +9581,7 @@
                     <a:bodyPr/>
                     <a:lstStyle/>
                     <a:p>
-                      <a:pPr indent="0" marL="0">
+                      <a:pPr marL="0" indent="0">
                         <a:buNone/>
                       </a:pPr>
                       <a:r>
@@ -9862,7 +9602,7 @@
                       </a:endParaRPr>
                     </a:p>
                   </a:txBody>
-                  <a:tcPr marL="91440" marR="91440" marT="45720" marB="45720">
+                  <a:tcPr>
                     <a:lnL w="6350" cap="flat" cmpd="sng" algn="ctr">
                       <a:solidFill>
                         <a:srgbClr val="E2E8F0"/>
@@ -9901,6 +9641,11 @@
                     </a:lnB>
                   </a:tcPr>
                 </a:tc>
+                <a:extLst>
+                  <a:ext uri="{0D108BD9-81ED-4DB2-BD59-A6C34878D82A}">
+                    <a16:rowId xmlns:a16="http://schemas.microsoft.com/office/drawing/2014/main" val="10000"/>
+                  </a:ext>
+                </a:extLst>
               </a:tr>
               <a:tr h="201168">
                 <a:tc>
@@ -9908,7 +9653,7 @@
                     <a:bodyPr/>
                     <a:lstStyle/>
                     <a:p>
-                      <a:pPr indent="0" marL="0">
+                      <a:pPr marL="0" indent="0">
                         <a:buNone/>
                       </a:pPr>
                       <a:r>
@@ -9929,7 +9674,7 @@
                       </a:endParaRPr>
                     </a:p>
                   </a:txBody>
-                  <a:tcPr marL="91440" marR="91440" marT="45720" marB="45720">
+                  <a:tcPr>
                     <a:lnL w="6350" cap="flat" cmpd="sng" algn="ctr">
                       <a:solidFill>
                         <a:srgbClr val="E2E8F0"/>
@@ -9973,7 +9718,7 @@
                     <a:bodyPr/>
                     <a:lstStyle/>
                     <a:p>
-                      <a:pPr indent="0" marL="0">
+                      <a:pPr marL="0" indent="0">
                         <a:buNone/>
                       </a:pPr>
                       <a:r>
@@ -9994,7 +9739,7 @@
                       </a:endParaRPr>
                     </a:p>
                   </a:txBody>
-                  <a:tcPr marL="91440" marR="91440" marT="45720" marB="45720">
+                  <a:tcPr>
                     <a:lnL w="6350" cap="flat" cmpd="sng" algn="ctr">
                       <a:solidFill>
                         <a:srgbClr val="E2E8F0"/>
@@ -10033,6 +9778,11 @@
                     </a:lnB>
                   </a:tcPr>
                 </a:tc>
+                <a:extLst>
+                  <a:ext uri="{0D108BD9-81ED-4DB2-BD59-A6C34878D82A}">
+                    <a16:rowId xmlns:a16="http://schemas.microsoft.com/office/drawing/2014/main" val="10001"/>
+                  </a:ext>
+                </a:extLst>
               </a:tr>
               <a:tr h="201168">
                 <a:tc>
@@ -10040,7 +9790,7 @@
                     <a:bodyPr/>
                     <a:lstStyle/>
                     <a:p>
-                      <a:pPr indent="0" marL="0">
+                      <a:pPr marL="0" indent="0">
                         <a:buNone/>
                       </a:pPr>
                       <a:r>
@@ -10061,7 +9811,7 @@
                       </a:endParaRPr>
                     </a:p>
                   </a:txBody>
-                  <a:tcPr marL="91440" marR="91440" marT="45720" marB="45720">
+                  <a:tcPr>
                     <a:lnL w="6350" cap="flat" cmpd="sng" algn="ctr">
                       <a:solidFill>
                         <a:srgbClr val="E2E8F0"/>
@@ -10105,7 +9855,7 @@
                     <a:bodyPr/>
                     <a:lstStyle/>
                     <a:p>
-                      <a:pPr indent="0" marL="0">
+                      <a:pPr marL="0" indent="0">
                         <a:buNone/>
                       </a:pPr>
                       <a:r>
@@ -10126,7 +9876,7 @@
                       </a:endParaRPr>
                     </a:p>
                   </a:txBody>
-                  <a:tcPr marL="91440" marR="91440" marT="45720" marB="45720">
+                  <a:tcPr>
                     <a:lnL w="6350" cap="flat" cmpd="sng" algn="ctr">
                       <a:solidFill>
                         <a:srgbClr val="E2E8F0"/>
@@ -10165,6 +9915,11 @@
                     </a:lnB>
                   </a:tcPr>
                 </a:tc>
+                <a:extLst>
+                  <a:ext uri="{0D108BD9-81ED-4DB2-BD59-A6C34878D82A}">
+                    <a16:rowId xmlns:a16="http://schemas.microsoft.com/office/drawing/2014/main" val="10002"/>
+                  </a:ext>
+                </a:extLst>
               </a:tr>
               <a:tr h="201168">
                 <a:tc>
@@ -10172,7 +9927,7 @@
                     <a:bodyPr/>
                     <a:lstStyle/>
                     <a:p>
-                      <a:pPr indent="0" marL="0">
+                      <a:pPr marL="0" indent="0">
                         <a:buNone/>
                       </a:pPr>
                       <a:r>
@@ -10193,7 +9948,7 @@
                       </a:endParaRPr>
                     </a:p>
                   </a:txBody>
-                  <a:tcPr marL="91440" marR="91440" marT="45720" marB="45720">
+                  <a:tcPr>
                     <a:lnL w="6350" cap="flat" cmpd="sng" algn="ctr">
                       <a:solidFill>
                         <a:srgbClr val="E2E8F0"/>
@@ -10237,7 +9992,7 @@
                     <a:bodyPr/>
                     <a:lstStyle/>
                     <a:p>
-                      <a:pPr indent="0" marL="0">
+                      <a:pPr marL="0" indent="0">
                         <a:buNone/>
                       </a:pPr>
                       <a:r>
@@ -10258,7 +10013,7 @@
                       </a:endParaRPr>
                     </a:p>
                   </a:txBody>
-                  <a:tcPr marL="91440" marR="91440" marT="45720" marB="45720">
+                  <a:tcPr>
                     <a:lnL w="6350" cap="flat" cmpd="sng" algn="ctr">
                       <a:solidFill>
                         <a:srgbClr val="E2E8F0"/>
@@ -10297,6 +10052,11 @@
                     </a:lnB>
                   </a:tcPr>
                 </a:tc>
+                <a:extLst>
+                  <a:ext uri="{0D108BD9-81ED-4DB2-BD59-A6C34878D82A}">
+                    <a16:rowId xmlns:a16="http://schemas.microsoft.com/office/drawing/2014/main" val="10003"/>
+                  </a:ext>
+                </a:extLst>
               </a:tr>
               <a:tr h="201168">
                 <a:tc>
@@ -10304,7 +10064,7 @@
                     <a:bodyPr/>
                     <a:lstStyle/>
                     <a:p>
-                      <a:pPr indent="0" marL="0">
+                      <a:pPr marL="0" indent="0">
                         <a:buNone/>
                       </a:pPr>
                       <a:r>
@@ -10325,7 +10085,7 @@
                       </a:endParaRPr>
                     </a:p>
                   </a:txBody>
-                  <a:tcPr marL="91440" marR="91440" marT="45720" marB="45720">
+                  <a:tcPr>
                     <a:lnL w="6350" cap="flat" cmpd="sng" algn="ctr">
                       <a:solidFill>
                         <a:srgbClr val="E2E8F0"/>
@@ -10369,7 +10129,7 @@
                     <a:bodyPr/>
                     <a:lstStyle/>
                     <a:p>
-                      <a:pPr indent="0" marL="0">
+                      <a:pPr marL="0" indent="0">
                         <a:buNone/>
                       </a:pPr>
                       <a:r>
@@ -10390,7 +10150,7 @@
                       </a:endParaRPr>
                     </a:p>
                   </a:txBody>
-                  <a:tcPr marL="91440" marR="91440" marT="45720" marB="45720">
+                  <a:tcPr>
                     <a:lnL w="6350" cap="flat" cmpd="sng" algn="ctr">
                       <a:solidFill>
                         <a:srgbClr val="E2E8F0"/>
@@ -10429,6 +10189,11 @@
                     </a:lnB>
                   </a:tcPr>
                 </a:tc>
+                <a:extLst>
+                  <a:ext uri="{0D108BD9-81ED-4DB2-BD59-A6C34878D82A}">
+                    <a16:rowId xmlns:a16="http://schemas.microsoft.com/office/drawing/2014/main" val="10004"/>
+                  </a:ext>
+                </a:extLst>
               </a:tr>
             </a:tbl>
           </a:graphicData>
@@ -10450,6 +10215,7 @@
         <a:solidFill>
           <a:srgbClr val="F0F9FF"/>
         </a:solidFill>
+        <a:effectLst/>
       </p:bgPr>
     </p:bg>
     <p:spTree>
@@ -10507,7 +10273,7 @@
           <a:bodyPr wrap="square" lIns="0" tIns="0" rIns="0" bIns="0" rtlCol="0" anchor="ctr"/>
           <a:lstStyle/>
           <a:p>
-            <a:pPr indent="0" marL="0">
+            <a:pPr marL="0" indent="0">
               <a:buNone/>
             </a:pPr>
             <a:r>
@@ -10527,7 +10293,7 @@
       </p:sp>
       <p:graphicFrame>
         <p:nvGraphicFramePr>
-          <p:cNvPr id="4" name="Chart 0" descr=""/>
+          <p:cNvPr id="4" name="Chart 0"/>
           <p:cNvGraphicFramePr/>
           <p:nvPr/>
         </p:nvGraphicFramePr>
@@ -10535,15 +10301,15 @@
           <a:off x="457200" y="1005840"/>
           <a:ext cx="4114800" cy="2560320"/>
         </p:xfrm>
-        <a:graphic xmlns:a="http://schemas.openxmlformats.org/drawingml/2006/main">
+        <a:graphic>
           <a:graphicData uri="http://schemas.openxmlformats.org/drawingml/2006/chart">
-            <c:chart xmlns:c="http://schemas.openxmlformats.org/drawingml/2006/chart" r:id="rId1"/>
+            <c:chart xmlns:c="http://schemas.openxmlformats.org/drawingml/2006/chart" xmlns:r="http://schemas.openxmlformats.org/officeDocument/2006/relationships" r:id="rId3"/>
           </a:graphicData>
         </a:graphic>
       </p:graphicFrame>
       <p:graphicFrame>
         <p:nvGraphicFramePr>
-          <p:cNvPr id="5" name="Chart 1" descr=""/>
+          <p:cNvPr id="5" name="Chart 1"/>
           <p:cNvGraphicFramePr/>
           <p:nvPr/>
         </p:nvGraphicFramePr>
@@ -10551,9 +10317,9 @@
           <a:off x="4754880" y="1005840"/>
           <a:ext cx="3931920" cy="2560320"/>
         </p:xfrm>
-        <a:graphic xmlns:a="http://schemas.openxmlformats.org/drawingml/2006/main">
+        <a:graphic>
           <a:graphicData uri="http://schemas.openxmlformats.org/drawingml/2006/chart">
-            <c:chart xmlns:c="http://schemas.openxmlformats.org/drawingml/2006/chart" r:id="rId2"/>
+            <c:chart xmlns:c="http://schemas.openxmlformats.org/drawingml/2006/chart" xmlns:r="http://schemas.openxmlformats.org/officeDocument/2006/relationships" r:id="rId4"/>
           </a:graphicData>
         </a:graphic>
       </p:graphicFrame>
@@ -10576,7 +10342,7 @@
           </a:solidFill>
           <a:ln/>
           <a:effectLst>
-            <a:outerShdw sx="100000" sy="100000" kx="0" ky="0" algn="bl" rotWithShape="0" blurRad="50800" dist="25400" dir="8100000">
+            <a:outerShdw blurRad="50800" dist="25400" dir="8100000" algn="bl" rotWithShape="0">
               <a:srgbClr val="000000">
                 <a:alpha val="12000"/>
               </a:srgbClr>
@@ -10586,14 +10352,14 @@
       </p:sp>
       <p:pic>
         <p:nvPicPr>
-          <p:cNvPr id="7" name="Image 0" descr="preencoded.png">    </p:cNvPr>
+          <p:cNvPr id="7" name="Image 0" descr="preencoded.png"/>
           <p:cNvPicPr>
             <a:picLocks noChangeAspect="1"/>
           </p:cNvPicPr>
           <p:nvPr/>
         </p:nvPicPr>
         <p:blipFill>
-          <a:blip r:embed="rId3"/>
+          <a:blip r:embed="rId5"/>
           <a:stretch>
             <a:fillRect/>
           </a:stretch>
@@ -10629,7 +10395,7 @@
           <a:bodyPr wrap="square" lIns="0" tIns="0" rIns="0" bIns="0" rtlCol="0" anchor="ctr"/>
           <a:lstStyle/>
           <a:p>
-            <a:pPr indent="0" marL="0">
+            <a:pPr marL="0" indent="0">
               <a:buNone/>
             </a:pPr>
             <a:r>
@@ -10668,7 +10434,7 @@
           <a:bodyPr wrap="square" lIns="0" tIns="0" rIns="0" bIns="0" rtlCol="0" anchor="ctr"/>
           <a:lstStyle/>
           <a:p>
-            <a:pPr indent="0" marL="0">
+            <a:pPr marL="0" indent="0">
               <a:lnSpc>
                 <a:spcPct val="120000"/>
               </a:lnSpc>
@@ -10705,6 +10471,7 @@
         <a:solidFill>
           <a:srgbClr val="F0F9FF"/>
         </a:solidFill>
+        <a:effectLst/>
       </p:bgPr>
     </p:bg>
     <p:spTree>
@@ -10762,7 +10529,7 @@
           <a:bodyPr wrap="square" lIns="0" tIns="0" rIns="0" bIns="0" rtlCol="0" anchor="ctr"/>
           <a:lstStyle/>
           <a:p>
-            <a:pPr indent="0" marL="0">
+            <a:pPr marL="0" indent="0">
               <a:buNone/>
             </a:pPr>
             <a:r>
@@ -10803,8 +10570,20 @@
             <a:tbl>
               <a:tblPr/>
               <a:tblGrid>
-                <a:gridCol w="4114800"/>
-                <a:gridCol w="4114800"/>
+                <a:gridCol w="4114800">
+                  <a:extLst>
+                    <a:ext uri="{9D8B030D-6E8A-4147-A177-3AD203B41FA5}">
+                      <a16:colId xmlns:a16="http://schemas.microsoft.com/office/drawing/2014/main" val="20000"/>
+                    </a:ext>
+                  </a:extLst>
+                </a:gridCol>
+                <a:gridCol w="4114800">
+                  <a:extLst>
+                    <a:ext uri="{9D8B030D-6E8A-4147-A177-3AD203B41FA5}">
+                      <a16:colId xmlns:a16="http://schemas.microsoft.com/office/drawing/2014/main" val="20001"/>
+                    </a:ext>
+                  </a:extLst>
+                </a:gridCol>
               </a:tblGrid>
               <a:tr h="320040">
                 <a:tc>
@@ -10812,7 +10591,7 @@
                     <a:bodyPr/>
                     <a:lstStyle/>
                     <a:p>
-                      <a:pPr indent="0" marL="0">
+                      <a:pPr marL="0" indent="0">
                         <a:buNone/>
                       </a:pPr>
                       <a:r>
@@ -10833,7 +10612,7 @@
                       </a:endParaRPr>
                     </a:p>
                   </a:txBody>
-                  <a:tcPr marL="91440" marR="91440" marT="45720" marB="45720">
+                  <a:tcPr>
                     <a:lnL w="6350" cap="flat" cmpd="sng" algn="ctr">
                       <a:solidFill>
                         <a:srgbClr val="E2E8F0"/>
@@ -10877,7 +10656,7 @@
                     <a:bodyPr/>
                     <a:lstStyle/>
                     <a:p>
-                      <a:pPr indent="0" marL="0">
+                      <a:pPr marL="0" indent="0">
                         <a:buNone/>
                       </a:pPr>
                       <a:r>
@@ -10898,7 +10677,7 @@
                       </a:endParaRPr>
                     </a:p>
                   </a:txBody>
-                  <a:tcPr marL="91440" marR="91440" marT="45720" marB="45720">
+                  <a:tcPr>
                     <a:lnL w="6350" cap="flat" cmpd="sng" algn="ctr">
                       <a:solidFill>
                         <a:srgbClr val="E2E8F0"/>
@@ -10937,6 +10716,11 @@
                     </a:lnB>
                   </a:tcPr>
                 </a:tc>
+                <a:extLst>
+                  <a:ext uri="{0D108BD9-81ED-4DB2-BD59-A6C34878D82A}">
+                    <a16:rowId xmlns:a16="http://schemas.microsoft.com/office/drawing/2014/main" val="10000"/>
+                  </a:ext>
+                </a:extLst>
               </a:tr>
               <a:tr h="320040">
                 <a:tc>
@@ -10944,7 +10728,7 @@
                     <a:bodyPr/>
                     <a:lstStyle/>
                     <a:p>
-                      <a:pPr indent="0" marL="0">
+                      <a:pPr marL="0" indent="0">
                         <a:buNone/>
                       </a:pPr>
                       <a:r>
@@ -10965,7 +10749,7 @@
                       </a:endParaRPr>
                     </a:p>
                   </a:txBody>
-                  <a:tcPr marL="91440" marR="91440" marT="45720" marB="45720">
+                  <a:tcPr>
                     <a:lnL w="6350" cap="flat" cmpd="sng" algn="ctr">
                       <a:solidFill>
                         <a:srgbClr val="E2E8F0"/>
@@ -11009,7 +10793,7 @@
                     <a:bodyPr/>
                     <a:lstStyle/>
                     <a:p>
-                      <a:pPr indent="0" marL="0">
+                      <a:pPr marL="0" indent="0">
                         <a:buNone/>
                       </a:pPr>
                       <a:r>
@@ -11030,7 +10814,7 @@
                       </a:endParaRPr>
                     </a:p>
                   </a:txBody>
-                  <a:tcPr marL="91440" marR="91440" marT="45720" marB="45720">
+                  <a:tcPr>
                     <a:lnL w="6350" cap="flat" cmpd="sng" algn="ctr">
                       <a:solidFill>
                         <a:srgbClr val="E2E8F0"/>
@@ -11069,6 +10853,11 @@
                     </a:lnB>
                   </a:tcPr>
                 </a:tc>
+                <a:extLst>
+                  <a:ext uri="{0D108BD9-81ED-4DB2-BD59-A6C34878D82A}">
+                    <a16:rowId xmlns:a16="http://schemas.microsoft.com/office/drawing/2014/main" val="10001"/>
+                  </a:ext>
+                </a:extLst>
               </a:tr>
               <a:tr h="320040">
                 <a:tc>
@@ -11076,7 +10865,7 @@
                     <a:bodyPr/>
                     <a:lstStyle/>
                     <a:p>
-                      <a:pPr indent="0" marL="0">
+                      <a:pPr marL="0" indent="0">
                         <a:buNone/>
                       </a:pPr>
                       <a:r>
@@ -11097,7 +10886,7 @@
                       </a:endParaRPr>
                     </a:p>
                   </a:txBody>
-                  <a:tcPr marL="91440" marR="91440" marT="45720" marB="45720">
+                  <a:tcPr>
                     <a:lnL w="6350" cap="flat" cmpd="sng" algn="ctr">
                       <a:solidFill>
                         <a:srgbClr val="E2E8F0"/>
@@ -11141,7 +10930,7 @@
                     <a:bodyPr/>
                     <a:lstStyle/>
                     <a:p>
-                      <a:pPr indent="0" marL="0">
+                      <a:pPr marL="0" indent="0">
                         <a:buNone/>
                       </a:pPr>
                       <a:r>
@@ -11162,7 +10951,7 @@
                       </a:endParaRPr>
                     </a:p>
                   </a:txBody>
-                  <a:tcPr marL="91440" marR="91440" marT="45720" marB="45720">
+                  <a:tcPr>
                     <a:lnL w="6350" cap="flat" cmpd="sng" algn="ctr">
                       <a:solidFill>
                         <a:srgbClr val="E2E8F0"/>
@@ -11201,6 +10990,11 @@
                     </a:lnB>
                   </a:tcPr>
                 </a:tc>
+                <a:extLst>
+                  <a:ext uri="{0D108BD9-81ED-4DB2-BD59-A6C34878D82A}">
+                    <a16:rowId xmlns:a16="http://schemas.microsoft.com/office/drawing/2014/main" val="10002"/>
+                  </a:ext>
+                </a:extLst>
               </a:tr>
               <a:tr h="320040">
                 <a:tc>
@@ -11208,7 +11002,7 @@
                     <a:bodyPr/>
                     <a:lstStyle/>
                     <a:p>
-                      <a:pPr indent="0" marL="0">
+                      <a:pPr marL="0" indent="0">
                         <a:buNone/>
                       </a:pPr>
                       <a:r>
@@ -11229,7 +11023,7 @@
                       </a:endParaRPr>
                     </a:p>
                   </a:txBody>
-                  <a:tcPr marL="91440" marR="91440" marT="45720" marB="45720">
+                  <a:tcPr>
                     <a:lnL w="6350" cap="flat" cmpd="sng" algn="ctr">
                       <a:solidFill>
                         <a:srgbClr val="E2E8F0"/>
@@ -11273,7 +11067,7 @@
                     <a:bodyPr/>
                     <a:lstStyle/>
                     <a:p>
-                      <a:pPr indent="0" marL="0">
+                      <a:pPr marL="0" indent="0">
                         <a:buNone/>
                       </a:pPr>
                       <a:r>
@@ -11294,7 +11088,7 @@
                       </a:endParaRPr>
                     </a:p>
                   </a:txBody>
-                  <a:tcPr marL="91440" marR="91440" marT="45720" marB="45720">
+                  <a:tcPr>
                     <a:lnL w="6350" cap="flat" cmpd="sng" algn="ctr">
                       <a:solidFill>
                         <a:srgbClr val="E2E8F0"/>
@@ -11333,6 +11127,11 @@
                     </a:lnB>
                   </a:tcPr>
                 </a:tc>
+                <a:extLst>
+                  <a:ext uri="{0D108BD9-81ED-4DB2-BD59-A6C34878D82A}">
+                    <a16:rowId xmlns:a16="http://schemas.microsoft.com/office/drawing/2014/main" val="10003"/>
+                  </a:ext>
+                </a:extLst>
               </a:tr>
               <a:tr h="320040">
                 <a:tc>
@@ -11340,7 +11139,7 @@
                     <a:bodyPr/>
                     <a:lstStyle/>
                     <a:p>
-                      <a:pPr indent="0" marL="0">
+                      <a:pPr marL="0" indent="0">
                         <a:buNone/>
                       </a:pPr>
                       <a:r>
@@ -11361,7 +11160,7 @@
                       </a:endParaRPr>
                     </a:p>
                   </a:txBody>
-                  <a:tcPr marL="91440" marR="91440" marT="45720" marB="45720">
+                  <a:tcPr>
                     <a:lnL w="6350" cap="flat" cmpd="sng" algn="ctr">
                       <a:solidFill>
                         <a:srgbClr val="E2E8F0"/>
@@ -11405,7 +11204,7 @@
                     <a:bodyPr/>
                     <a:lstStyle/>
                     <a:p>
-                      <a:pPr indent="0" marL="0">
+                      <a:pPr marL="0" indent="0">
                         <a:buNone/>
                       </a:pPr>
                       <a:r>
@@ -11426,7 +11225,7 @@
                       </a:endParaRPr>
                     </a:p>
                   </a:txBody>
-                  <a:tcPr marL="91440" marR="91440" marT="45720" marB="45720">
+                  <a:tcPr>
                     <a:lnL w="6350" cap="flat" cmpd="sng" algn="ctr">
                       <a:solidFill>
                         <a:srgbClr val="E2E8F0"/>
@@ -11465,6 +11264,11 @@
                     </a:lnB>
                   </a:tcPr>
                 </a:tc>
+                <a:extLst>
+                  <a:ext uri="{0D108BD9-81ED-4DB2-BD59-A6C34878D82A}">
+                    <a16:rowId xmlns:a16="http://schemas.microsoft.com/office/drawing/2014/main" val="10004"/>
+                  </a:ext>
+                </a:extLst>
               </a:tr>
               <a:tr h="320040">
                 <a:tc>
@@ -11472,7 +11276,7 @@
                     <a:bodyPr/>
                     <a:lstStyle/>
                     <a:p>
-                      <a:pPr indent="0" marL="0">
+                      <a:pPr marL="0" indent="0">
                         <a:buNone/>
                       </a:pPr>
                       <a:r>
@@ -11493,7 +11297,7 @@
                       </a:endParaRPr>
                     </a:p>
                   </a:txBody>
-                  <a:tcPr marL="91440" marR="91440" marT="45720" marB="45720">
+                  <a:tcPr>
                     <a:lnL w="6350" cap="flat" cmpd="sng" algn="ctr">
                       <a:solidFill>
                         <a:srgbClr val="E2E8F0"/>
@@ -11537,7 +11341,7 @@
                     <a:bodyPr/>
                     <a:lstStyle/>
                     <a:p>
-                      <a:pPr indent="0" marL="0">
+                      <a:pPr marL="0" indent="0">
                         <a:buNone/>
                       </a:pPr>
                       <a:r>
@@ -11558,7 +11362,7 @@
                       </a:endParaRPr>
                     </a:p>
                   </a:txBody>
-                  <a:tcPr marL="91440" marR="91440" marT="45720" marB="45720">
+                  <a:tcPr>
                     <a:lnL w="6350" cap="flat" cmpd="sng" algn="ctr">
                       <a:solidFill>
                         <a:srgbClr val="E2E8F0"/>
@@ -11597,6 +11401,11 @@
                     </a:lnB>
                   </a:tcPr>
                 </a:tc>
+                <a:extLst>
+                  <a:ext uri="{0D108BD9-81ED-4DB2-BD59-A6C34878D82A}">
+                    <a16:rowId xmlns:a16="http://schemas.microsoft.com/office/drawing/2014/main" val="10005"/>
+                  </a:ext>
+                </a:extLst>
               </a:tr>
             </a:tbl>
           </a:graphicData>
@@ -11621,7 +11430,7 @@
           </a:solidFill>
           <a:ln/>
           <a:effectLst>
-            <a:outerShdw sx="100000" sy="100000" kx="0" ky="0" algn="bl" rotWithShape="0" blurRad="50800" dist="25400" dir="8100000">
+            <a:outerShdw blurRad="50800" dist="25400" dir="8100000" algn="bl" rotWithShape="0">
               <a:srgbClr val="000000">
                 <a:alpha val="12000"/>
               </a:srgbClr>
@@ -11650,7 +11459,7 @@
           <a:bodyPr wrap="square" lIns="0" tIns="0" rIns="0" bIns="0" rtlCol="0" anchor="ctr"/>
           <a:lstStyle/>
           <a:p>
-            <a:pPr indent="0" marL="0">
+            <a:pPr marL="0" indent="0">
               <a:buNone/>
             </a:pPr>
             <a:r>
@@ -11689,7 +11498,7 @@
           <a:bodyPr wrap="square" rtlCol="0" anchor="ctr"/>
           <a:lstStyle/>
           <a:p>
-            <a:pPr indent="0" marL="0">
+            <a:pPr marL="0" indent="0">
               <a:lnSpc>
                 <a:spcPct val="140000"/>
               </a:lnSpc>
@@ -11709,7 +11518,7 @@
             <a:endParaRPr lang="en-US" sz="1100" dirty="0"/>
           </a:p>
           <a:p>
-            <a:pPr indent="0" marL="0">
+            <a:pPr marL="0" indent="0">
               <a:lnSpc>
                 <a:spcPct val="140000"/>
               </a:lnSpc>
@@ -11729,7 +11538,7 @@
             <a:endParaRPr lang="en-US" sz="1100" dirty="0"/>
           </a:p>
           <a:p>
-            <a:pPr indent="0" marL="0">
+            <a:pPr marL="0" indent="0">
               <a:lnSpc>
                 <a:spcPct val="140000"/>
               </a:lnSpc>
@@ -11749,7 +11558,7 @@
             <a:endParaRPr lang="en-US" sz="1100" dirty="0"/>
           </a:p>
           <a:p>
-            <a:pPr indent="0" marL="0">
+            <a:pPr marL="0" indent="0">
               <a:lnSpc>
                 <a:spcPct val="140000"/>
               </a:lnSpc>
@@ -11786,6 +11595,7 @@
         <a:solidFill>
           <a:srgbClr val="F0F9FF"/>
         </a:solidFill>
+        <a:effectLst/>
       </p:bgPr>
     </p:bg>
     <p:spTree>
@@ -11843,7 +11653,7 @@
           <a:bodyPr wrap="square" lIns="0" tIns="0" rIns="0" bIns="0" rtlCol="0" anchor="ctr"/>
           <a:lstStyle/>
           <a:p>
-            <a:pPr indent="0" marL="0">
+            <a:pPr marL="0" indent="0">
               <a:buNone/>
             </a:pPr>
             <a:r>
@@ -11863,14 +11673,14 @@
       </p:sp>
       <p:pic>
         <p:nvPicPr>
-          <p:cNvPr id="4" name="Image 0" descr="preencoded.png">    </p:cNvPr>
+          <p:cNvPr id="4" name="Image 0" descr="preencoded.png"/>
           <p:cNvPicPr>
             <a:picLocks noChangeAspect="1"/>
           </p:cNvPicPr>
           <p:nvPr/>
         </p:nvPicPr>
         <p:blipFill>
-          <a:blip r:embed="rId1"/>
+          <a:blip r:embed="rId3"/>
           <a:stretch>
             <a:fillRect/>
           </a:stretch>
@@ -11906,7 +11716,7 @@
           <a:bodyPr wrap="square" lIns="0" tIns="0" rIns="0" bIns="0" rtlCol="0" anchor="ctr"/>
           <a:lstStyle/>
           <a:p>
-            <a:pPr indent="0" marL="0">
+            <a:pPr marL="0" indent="0">
               <a:buNone/>
             </a:pPr>
             <a:r>
@@ -11943,7 +11753,7 @@
           </a:solidFill>
           <a:ln/>
           <a:effectLst>
-            <a:outerShdw sx="100000" sy="100000" kx="0" ky="0" algn="bl" rotWithShape="0" blurRad="50800" dist="25400" dir="8100000">
+            <a:outerShdw blurRad="50800" dist="25400" dir="8100000" algn="bl" rotWithShape="0">
               <a:srgbClr val="000000">
                 <a:alpha val="12000"/>
               </a:srgbClr>
@@ -11992,7 +11802,7 @@
           <a:bodyPr wrap="square" lIns="0" tIns="0" rIns="0" bIns="0" rtlCol="0" anchor="ctr"/>
           <a:lstStyle/>
           <a:p>
-            <a:pPr indent="0" marL="0">
+            <a:pPr marL="0" indent="0">
               <a:buNone/>
             </a:pPr>
             <a:r>
@@ -12031,7 +11841,7 @@
           <a:bodyPr wrap="square" lIns="0" tIns="0" rIns="0" bIns="0" rtlCol="0" anchor="ctr"/>
           <a:lstStyle/>
           <a:p>
-            <a:pPr indent="0" marL="0">
+            <a:pPr marL="0" indent="0">
               <a:buNone/>
             </a:pPr>
             <a:r>
@@ -12068,7 +11878,7 @@
           </a:solidFill>
           <a:ln/>
           <a:effectLst>
-            <a:outerShdw sx="100000" sy="100000" kx="0" ky="0" algn="bl" rotWithShape="0" blurRad="50800" dist="25400" dir="8100000">
+            <a:outerShdw blurRad="50800" dist="25400" dir="8100000" algn="bl" rotWithShape="0">
               <a:srgbClr val="000000">
                 <a:alpha val="12000"/>
               </a:srgbClr>
@@ -12117,7 +11927,7 @@
           <a:bodyPr wrap="square" lIns="0" tIns="0" rIns="0" bIns="0" rtlCol="0" anchor="ctr"/>
           <a:lstStyle/>
           <a:p>
-            <a:pPr indent="0" marL="0">
+            <a:pPr marL="0" indent="0">
               <a:buNone/>
             </a:pPr>
             <a:r>
@@ -12156,7 +11966,7 @@
           <a:bodyPr wrap="square" lIns="0" tIns="0" rIns="0" bIns="0" rtlCol="0" anchor="ctr"/>
           <a:lstStyle/>
           <a:p>
-            <a:pPr indent="0" marL="0">
+            <a:pPr marL="0" indent="0">
               <a:buNone/>
             </a:pPr>
             <a:r>
@@ -12193,7 +12003,7 @@
           </a:solidFill>
           <a:ln/>
           <a:effectLst>
-            <a:outerShdw sx="100000" sy="100000" kx="0" ky="0" algn="bl" rotWithShape="0" blurRad="50800" dist="25400" dir="8100000">
+            <a:outerShdw blurRad="50800" dist="25400" dir="8100000" algn="bl" rotWithShape="0">
               <a:srgbClr val="000000">
                 <a:alpha val="12000"/>
               </a:srgbClr>
@@ -12242,7 +12052,7 @@
           <a:bodyPr wrap="square" lIns="0" tIns="0" rIns="0" bIns="0" rtlCol="0" anchor="ctr"/>
           <a:lstStyle/>
           <a:p>
-            <a:pPr indent="0" marL="0">
+            <a:pPr marL="0" indent="0">
               <a:buNone/>
             </a:pPr>
             <a:r>
@@ -12281,7 +12091,7 @@
           <a:bodyPr wrap="square" lIns="0" tIns="0" rIns="0" bIns="0" rtlCol="0" anchor="ctr"/>
           <a:lstStyle/>
           <a:p>
-            <a:pPr indent="0" marL="0">
+            <a:pPr marL="0" indent="0">
               <a:buNone/>
             </a:pPr>
             <a:r>
@@ -12321,14 +12131,14 @@
       </p:sp>
       <p:pic>
         <p:nvPicPr>
-          <p:cNvPr id="19" name="Image 1" descr="preencoded.png">    </p:cNvPr>
+          <p:cNvPr id="19" name="Image 1" descr="preencoded.png"/>
           <p:cNvPicPr>
             <a:picLocks noChangeAspect="1"/>
           </p:cNvPicPr>
           <p:nvPr/>
         </p:nvPicPr>
         <p:blipFill>
-          <a:blip r:embed="rId2"/>
+          <a:blip r:embed="rId4"/>
           <a:stretch>
             <a:fillRect/>
           </a:stretch>
@@ -12364,7 +12174,7 @@
           <a:bodyPr wrap="square" lIns="0" tIns="0" rIns="0" bIns="0" rtlCol="0" anchor="ctr"/>
           <a:lstStyle/>
           <a:p>
-            <a:pPr indent="0" marL="0">
+            <a:pPr marL="0" indent="0">
               <a:lnSpc>
                 <a:spcPct val="130000"/>
               </a:lnSpc>
@@ -12401,6 +12211,7 @@
         <a:solidFill>
           <a:srgbClr val="F0F9FF"/>
         </a:solidFill>
+        <a:effectLst/>
       </p:bgPr>
     </p:bg>
     <p:spTree>
@@ -12458,7 +12269,7 @@
           <a:bodyPr wrap="square" lIns="0" tIns="0" rIns="0" bIns="0" rtlCol="0" anchor="ctr"/>
           <a:lstStyle/>
           <a:p>
-            <a:pPr indent="0" marL="0">
+            <a:pPr marL="0" indent="0">
               <a:buNone/>
             </a:pPr>
             <a:r>
@@ -12478,14 +12289,14 @@
       </p:sp>
       <p:pic>
         <p:nvPicPr>
-          <p:cNvPr id="4" name="Image 0" descr="preencoded.png">    </p:cNvPr>
+          <p:cNvPr id="4" name="Image 0" descr="preencoded.png"/>
           <p:cNvPicPr>
             <a:picLocks noChangeAspect="1"/>
           </p:cNvPicPr>
           <p:nvPr/>
         </p:nvPicPr>
         <p:blipFill>
-          <a:blip r:embed="rId1"/>
+          <a:blip r:embed="rId3"/>
           <a:stretch>
             <a:fillRect/>
           </a:stretch>
@@ -12521,7 +12332,7 @@
           <a:bodyPr wrap="square" lIns="0" tIns="0" rIns="0" bIns="0" rtlCol="0" anchor="ctr"/>
           <a:lstStyle/>
           <a:p>
-            <a:pPr indent="0" marL="0">
+            <a:pPr marL="0" indent="0">
               <a:buNone/>
             </a:pPr>
             <a:r>
@@ -12558,7 +12369,7 @@
           </a:solidFill>
           <a:ln/>
           <a:effectLst>
-            <a:outerShdw sx="100000" sy="100000" kx="0" ky="0" algn="bl" rotWithShape="0" blurRad="50800" dist="25400" dir="8100000">
+            <a:outerShdw blurRad="50800" dist="25400" dir="8100000" algn="bl" rotWithShape="0">
               <a:srgbClr val="000000">
                 <a:alpha val="12000"/>
               </a:srgbClr>
@@ -12607,7 +12418,7 @@
           <a:bodyPr wrap="square" lIns="0" tIns="0" rIns="0" bIns="0" rtlCol="0" anchor="ctr"/>
           <a:lstStyle/>
           <a:p>
-            <a:pPr indent="0" marL="0">
+            <a:pPr marL="0" indent="0">
               <a:buNone/>
             </a:pPr>
             <a:r>
@@ -12646,7 +12457,7 @@
           <a:bodyPr wrap="square" lIns="0" tIns="0" rIns="0" bIns="0" rtlCol="0" anchor="ctr"/>
           <a:lstStyle/>
           <a:p>
-            <a:pPr indent="0" marL="0">
+            <a:pPr marL="0" indent="0">
               <a:lnSpc>
                 <a:spcPct val="120000"/>
               </a:lnSpc>
@@ -12686,7 +12497,7 @@
           </a:solidFill>
           <a:ln/>
           <a:effectLst>
-            <a:outerShdw sx="100000" sy="100000" kx="0" ky="0" algn="bl" rotWithShape="0" blurRad="50800" dist="25400" dir="8100000">
+            <a:outerShdw blurRad="50800" dist="25400" dir="8100000" algn="bl" rotWithShape="0">
               <a:srgbClr val="000000">
                 <a:alpha val="12000"/>
               </a:srgbClr>
@@ -12735,7 +12546,7 @@
           <a:bodyPr wrap="square" lIns="0" tIns="0" rIns="0" bIns="0" rtlCol="0" anchor="ctr"/>
           <a:lstStyle/>
           <a:p>
-            <a:pPr indent="0" marL="0">
+            <a:pPr marL="0" indent="0">
               <a:buNone/>
             </a:pPr>
             <a:r>
@@ -12774,7 +12585,7 @@
           <a:bodyPr wrap="square" lIns="0" tIns="0" rIns="0" bIns="0" rtlCol="0" anchor="ctr"/>
           <a:lstStyle/>
           <a:p>
-            <a:pPr indent="0" marL="0">
+            <a:pPr marL="0" indent="0">
               <a:lnSpc>
                 <a:spcPct val="120000"/>
               </a:lnSpc>
@@ -12814,7 +12625,7 @@
           </a:solidFill>
           <a:ln/>
           <a:effectLst>
-            <a:outerShdw sx="100000" sy="100000" kx="0" ky="0" algn="bl" rotWithShape="0" blurRad="50800" dist="25400" dir="8100000">
+            <a:outerShdw blurRad="50800" dist="25400" dir="8100000" algn="bl" rotWithShape="0">
               <a:srgbClr val="000000">
                 <a:alpha val="12000"/>
               </a:srgbClr>
@@ -12863,7 +12674,7 @@
           <a:bodyPr wrap="square" lIns="0" tIns="0" rIns="0" bIns="0" rtlCol="0" anchor="ctr"/>
           <a:lstStyle/>
           <a:p>
-            <a:pPr indent="0" marL="0">
+            <a:pPr marL="0" indent="0">
               <a:buNone/>
             </a:pPr>
             <a:r>
@@ -12902,7 +12713,7 @@
           <a:bodyPr wrap="square" lIns="0" tIns="0" rIns="0" bIns="0" rtlCol="0" anchor="ctr"/>
           <a:lstStyle/>
           <a:p>
-            <a:pPr indent="0" marL="0">
+            <a:pPr marL="0" indent="0">
               <a:lnSpc>
                 <a:spcPct val="120000"/>
               </a:lnSpc>
@@ -12942,7 +12753,7 @@
           </a:solidFill>
           <a:ln/>
           <a:effectLst>
-            <a:outerShdw sx="100000" sy="100000" kx="0" ky="0" algn="bl" rotWithShape="0" blurRad="50800" dist="25400" dir="8100000">
+            <a:outerShdw blurRad="50800" dist="25400" dir="8100000" algn="bl" rotWithShape="0">
               <a:srgbClr val="000000">
                 <a:alpha val="12000"/>
               </a:srgbClr>
@@ -12991,7 +12802,7 @@
           <a:bodyPr wrap="square" lIns="0" tIns="0" rIns="0" bIns="0" rtlCol="0" anchor="ctr"/>
           <a:lstStyle/>
           <a:p>
-            <a:pPr indent="0" marL="0">
+            <a:pPr marL="0" indent="0">
               <a:buNone/>
             </a:pPr>
             <a:r>
@@ -13030,7 +12841,7 @@
           <a:bodyPr wrap="square" lIns="0" tIns="0" rIns="0" bIns="0" rtlCol="0" anchor="ctr"/>
           <a:lstStyle/>
           <a:p>
-            <a:pPr indent="0" marL="0">
+            <a:pPr marL="0" indent="0">
               <a:lnSpc>
                 <a:spcPct val="120000"/>
               </a:lnSpc>
@@ -13073,14 +12884,14 @@
       </p:sp>
       <p:pic>
         <p:nvPicPr>
-          <p:cNvPr id="23" name="Image 1" descr="preencoded.png">    </p:cNvPr>
+          <p:cNvPr id="23" name="Image 1" descr="preencoded.png"/>
           <p:cNvPicPr>
             <a:picLocks noChangeAspect="1"/>
           </p:cNvPicPr>
           <p:nvPr/>
         </p:nvPicPr>
         <p:blipFill>
-          <a:blip r:embed="rId2"/>
+          <a:blip r:embed="rId4"/>
           <a:stretch>
             <a:fillRect/>
           </a:stretch>
@@ -13116,7 +12927,7 @@
           <a:bodyPr wrap="square" lIns="0" tIns="0" rIns="0" bIns="0" rtlCol="0" anchor="ctr"/>
           <a:lstStyle/>
           <a:p>
-            <a:pPr indent="0" marL="0">
+            <a:pPr marL="0" indent="0">
               <a:lnSpc>
                 <a:spcPct val="130000"/>
               </a:lnSpc>
@@ -13438,4 +13249,299 @@
     </a:ext>
   </a:extLst>
 </a:theme>
+</file>
+
+<file path=ppt/theme/theme2.xml><?xml version="1.0" encoding="utf-8"?>
+<a:theme xmlns:a="http://schemas.openxmlformats.org/drawingml/2006/main" name="Thème Office">
+  <a:themeElements>
+    <a:clrScheme name="Office">
+      <a:dk1>
+        <a:sysClr val="windowText" lastClr="000000"/>
+      </a:dk1>
+      <a:lt1>
+        <a:sysClr val="window" lastClr="FFFFFF"/>
+      </a:lt1>
+      <a:dk2>
+        <a:srgbClr val="44546A"/>
+      </a:dk2>
+      <a:lt2>
+        <a:srgbClr val="E7E6E6"/>
+      </a:lt2>
+      <a:accent1>
+        <a:srgbClr val="4472C4"/>
+      </a:accent1>
+      <a:accent2>
+        <a:srgbClr val="ED7D31"/>
+      </a:accent2>
+      <a:accent3>
+        <a:srgbClr val="A5A5A5"/>
+      </a:accent3>
+      <a:accent4>
+        <a:srgbClr val="FFC000"/>
+      </a:accent4>
+      <a:accent5>
+        <a:srgbClr val="5B9BD5"/>
+      </a:accent5>
+      <a:accent6>
+        <a:srgbClr val="70AD47"/>
+      </a:accent6>
+      <a:hlink>
+        <a:srgbClr val="0563C1"/>
+      </a:hlink>
+      <a:folHlink>
+        <a:srgbClr val="954F72"/>
+      </a:folHlink>
+    </a:clrScheme>
+    <a:fontScheme name="Office">
+      <a:majorFont>
+        <a:latin typeface="Calibri Light" panose="020F0302020204030204"/>
+        <a:ea typeface=""/>
+        <a:cs typeface=""/>
+        <a:font script="Jpan" typeface="游ゴシック Light"/>
+        <a:font script="Hang" typeface="맑은 고딕"/>
+        <a:font script="Hans" typeface="等线 Light"/>
+        <a:font script="Hant" typeface="新細明體"/>
+        <a:font script="Arab" typeface="Times New Roman"/>
+        <a:font script="Hebr" typeface="Times New Roman"/>
+        <a:font script="Thai" typeface="Angsana New"/>
+        <a:font script="Ethi" typeface="Nyala"/>
+        <a:font script="Beng" typeface="Vrinda"/>
+        <a:font script="Gujr" typeface="Shruti"/>
+        <a:font script="Khmr" typeface="MoolBoran"/>
+        <a:font script="Knda" typeface="Tunga"/>
+        <a:font script="Guru" typeface="Raavi"/>
+        <a:font script="Cans" typeface="Euphemia"/>
+        <a:font script="Cher" typeface="Plantagenet Cherokee"/>
+        <a:font script="Yiii" typeface="Microsoft Yi Baiti"/>
+        <a:font script="Tibt" typeface="Microsoft Himalaya"/>
+        <a:font script="Thaa" typeface="MV Boli"/>
+        <a:font script="Deva" typeface="Mangal"/>
+        <a:font script="Telu" typeface="Gautami"/>
+        <a:font script="Taml" typeface="Latha"/>
+        <a:font script="Syrc" typeface="Estrangelo Edessa"/>
+        <a:font script="Orya" typeface="Kalinga"/>
+        <a:font script="Mlym" typeface="Kartika"/>
+        <a:font script="Laoo" typeface="DokChampa"/>
+        <a:font script="Sinh" typeface="Iskoola Pota"/>
+        <a:font script="Mong" typeface="Mongolian Baiti"/>
+        <a:font script="Viet" typeface="Times New Roman"/>
+        <a:font script="Uigh" typeface="Microsoft Uighur"/>
+        <a:font script="Geor" typeface="Sylfaen"/>
+        <a:font script="Armn" typeface="Arial"/>
+        <a:font script="Bugi" typeface="Leelawadee UI"/>
+        <a:font script="Bopo" typeface="Microsoft JhengHei"/>
+        <a:font script="Java" typeface="Javanese Text"/>
+        <a:font script="Lisu" typeface="Segoe UI"/>
+        <a:font script="Mymr" typeface="Myanmar Text"/>
+        <a:font script="Nkoo" typeface="Ebrima"/>
+        <a:font script="Olck" typeface="Nirmala UI"/>
+        <a:font script="Osma" typeface="Ebrima"/>
+        <a:font script="Phag" typeface="Phagspa"/>
+        <a:font script="Syrn" typeface="Estrangelo Edessa"/>
+        <a:font script="Syrj" typeface="Estrangelo Edessa"/>
+        <a:font script="Syre" typeface="Estrangelo Edessa"/>
+        <a:font script="Sora" typeface="Nirmala UI"/>
+        <a:font script="Tale" typeface="Microsoft Tai Le"/>
+        <a:font script="Talu" typeface="Microsoft New Tai Lue"/>
+        <a:font script="Tfng" typeface="Ebrima"/>
+      </a:majorFont>
+      <a:minorFont>
+        <a:latin typeface="Calibri" panose="020F0502020204030204"/>
+        <a:ea typeface=""/>
+        <a:cs typeface=""/>
+        <a:font script="Jpan" typeface="游ゴシック"/>
+        <a:font script="Hang" typeface="맑은 고딕"/>
+        <a:font script="Hans" typeface="等线"/>
+        <a:font script="Hant" typeface="新細明體"/>
+        <a:font script="Arab" typeface="Arial"/>
+        <a:font script="Hebr" typeface="Arial"/>
+        <a:font script="Thai" typeface="Cordia New"/>
+        <a:font script="Ethi" typeface="Nyala"/>
+        <a:font script="Beng" typeface="Vrinda"/>
+        <a:font script="Gujr" typeface="Shruti"/>
+        <a:font script="Khmr" typeface="DaunPenh"/>
+        <a:font script="Knda" typeface="Tunga"/>
+        <a:font script="Guru" typeface="Raavi"/>
+        <a:font script="Cans" typeface="Euphemia"/>
+        <a:font script="Cher" typeface="Plantagenet Cherokee"/>
+        <a:font script="Yiii" typeface="Microsoft Yi Baiti"/>
+        <a:font script="Tibt" typeface="Microsoft Himalaya"/>
+        <a:font script="Thaa" typeface="MV Boli"/>
+        <a:font script="Deva" typeface="Mangal"/>
+        <a:font script="Telu" typeface="Gautami"/>
+        <a:font script="Taml" typeface="Latha"/>
+        <a:font script="Syrc" typeface="Estrangelo Edessa"/>
+        <a:font script="Orya" typeface="Kalinga"/>
+        <a:font script="Mlym" typeface="Kartika"/>
+        <a:font script="Laoo" typeface="DokChampa"/>
+        <a:font script="Sinh" typeface="Iskoola Pota"/>
+        <a:font script="Mong" typeface="Mongolian Baiti"/>
+        <a:font script="Viet" typeface="Arial"/>
+        <a:font script="Uigh" typeface="Microsoft Uighur"/>
+        <a:font script="Geor" typeface="Sylfaen"/>
+        <a:font script="Armn" typeface="Arial"/>
+        <a:font script="Bugi" typeface="Leelawadee UI"/>
+        <a:font script="Bopo" typeface="Microsoft JhengHei"/>
+        <a:font script="Java" typeface="Javanese Text"/>
+        <a:font script="Lisu" typeface="Segoe UI"/>
+        <a:font script="Mymr" typeface="Myanmar Text"/>
+        <a:font script="Nkoo" typeface="Ebrima"/>
+        <a:font script="Olck" typeface="Nirmala UI"/>
+        <a:font script="Osma" typeface="Ebrima"/>
+        <a:font script="Phag" typeface="Phagspa"/>
+        <a:font script="Syrn" typeface="Estrangelo Edessa"/>
+        <a:font script="Syrj" typeface="Estrangelo Edessa"/>
+        <a:font script="Syre" typeface="Estrangelo Edessa"/>
+        <a:font script="Sora" typeface="Nirmala UI"/>
+        <a:font script="Tale" typeface="Microsoft Tai Le"/>
+        <a:font script="Talu" typeface="Microsoft New Tai Lue"/>
+        <a:font script="Tfng" typeface="Ebrima"/>
+      </a:minorFont>
+    </a:fontScheme>
+    <a:fmtScheme name="Office">
+      <a:fillStyleLst>
+        <a:solidFill>
+          <a:schemeClr val="phClr"/>
+        </a:solidFill>
+        <a:gradFill rotWithShape="1">
+          <a:gsLst>
+            <a:gs pos="0">
+              <a:schemeClr val="phClr">
+                <a:lumMod val="110000"/>
+                <a:satMod val="105000"/>
+                <a:tint val="67000"/>
+              </a:schemeClr>
+            </a:gs>
+            <a:gs pos="50000">
+              <a:schemeClr val="phClr">
+                <a:lumMod val="105000"/>
+                <a:satMod val="103000"/>
+                <a:tint val="73000"/>
+              </a:schemeClr>
+            </a:gs>
+            <a:gs pos="100000">
+              <a:schemeClr val="phClr">
+                <a:lumMod val="105000"/>
+                <a:satMod val="109000"/>
+                <a:tint val="81000"/>
+              </a:schemeClr>
+            </a:gs>
+          </a:gsLst>
+          <a:lin ang="5400000" scaled="0"/>
+        </a:gradFill>
+        <a:gradFill rotWithShape="1">
+          <a:gsLst>
+            <a:gs pos="0">
+              <a:schemeClr val="phClr">
+                <a:satMod val="103000"/>
+                <a:lumMod val="102000"/>
+                <a:tint val="94000"/>
+              </a:schemeClr>
+            </a:gs>
+            <a:gs pos="50000">
+              <a:schemeClr val="phClr">
+                <a:satMod val="110000"/>
+                <a:lumMod val="100000"/>
+                <a:shade val="100000"/>
+              </a:schemeClr>
+            </a:gs>
+            <a:gs pos="100000">
+              <a:schemeClr val="phClr">
+                <a:lumMod val="99000"/>
+                <a:satMod val="120000"/>
+                <a:shade val="78000"/>
+              </a:schemeClr>
+            </a:gs>
+          </a:gsLst>
+          <a:lin ang="5400000" scaled="0"/>
+        </a:gradFill>
+      </a:fillStyleLst>
+      <a:lnStyleLst>
+        <a:ln w="6350" cap="flat" cmpd="sng" algn="ctr">
+          <a:solidFill>
+            <a:schemeClr val="phClr"/>
+          </a:solidFill>
+          <a:prstDash val="solid"/>
+          <a:miter lim="800000"/>
+        </a:ln>
+        <a:ln w="12700" cap="flat" cmpd="sng" algn="ctr">
+          <a:solidFill>
+            <a:schemeClr val="phClr"/>
+          </a:solidFill>
+          <a:prstDash val="solid"/>
+          <a:miter lim="800000"/>
+        </a:ln>
+        <a:ln w="19050" cap="flat" cmpd="sng" algn="ctr">
+          <a:solidFill>
+            <a:schemeClr val="phClr"/>
+          </a:solidFill>
+          <a:prstDash val="solid"/>
+          <a:miter lim="800000"/>
+        </a:ln>
+      </a:lnStyleLst>
+      <a:effectStyleLst>
+        <a:effectStyle>
+          <a:effectLst/>
+        </a:effectStyle>
+        <a:effectStyle>
+          <a:effectLst/>
+        </a:effectStyle>
+        <a:effectStyle>
+          <a:effectLst>
+            <a:outerShdw blurRad="57150" dist="19050" dir="5400000" algn="ctr" rotWithShape="0">
+              <a:srgbClr val="000000">
+                <a:alpha val="63000"/>
+              </a:srgbClr>
+            </a:outerShdw>
+          </a:effectLst>
+        </a:effectStyle>
+      </a:effectStyleLst>
+      <a:bgFillStyleLst>
+        <a:solidFill>
+          <a:schemeClr val="phClr"/>
+        </a:solidFill>
+        <a:solidFill>
+          <a:schemeClr val="phClr">
+            <a:tint val="95000"/>
+            <a:satMod val="170000"/>
+          </a:schemeClr>
+        </a:solidFill>
+        <a:gradFill rotWithShape="1">
+          <a:gsLst>
+            <a:gs pos="0">
+              <a:schemeClr val="phClr">
+                <a:tint val="93000"/>
+                <a:satMod val="150000"/>
+                <a:shade val="98000"/>
+                <a:lumMod val="102000"/>
+              </a:schemeClr>
+            </a:gs>
+            <a:gs pos="50000">
+              <a:schemeClr val="phClr">
+                <a:tint val="98000"/>
+                <a:satMod val="130000"/>
+                <a:shade val="90000"/>
+                <a:lumMod val="103000"/>
+              </a:schemeClr>
+            </a:gs>
+            <a:gs pos="100000">
+              <a:schemeClr val="phClr">
+                <a:shade val="63000"/>
+                <a:satMod val="120000"/>
+              </a:schemeClr>
+            </a:gs>
+          </a:gsLst>
+          <a:lin ang="5400000" scaled="0"/>
+        </a:gradFill>
+      </a:bgFillStyleLst>
+    </a:fmtScheme>
+  </a:themeElements>
+  <a:objectDefaults/>
+  <a:extraClrSchemeLst/>
+  <a:extLst>
+    <a:ext uri="{05A4C25C-085E-4340-85A3-A5531E510DB2}">
+      <thm15:themeFamily xmlns:thm15="http://schemas.microsoft.com/office/thememl/2012/main" name="Office Theme" id="{62F939B6-93AF-4DB8-9C6B-D6C7DFDC589F}" vid="{4A3C46E8-61CC-4603-A589-7422A47A8E4A}"/>
+    </a:ext>
+  </a:extLst>
+</a:theme>
 </file>